--- a/docs/pptx/whole/ritu-linsubhr-disc-aki2.pptx
+++ b/docs/pptx/whole/ritu-linsubhr-disc-aki2.pptx
@@ -2443,7 +2443,7 @@
           </p:nvSpPr>
           <p:spPr>
             <a:xfrm>
-              <a:off x="1942521" y="2073503"/>
+              <a:off x="1943067" y="2073503"/>
               <a:ext cx="0" cy="3649639"/>
             </a:xfrm>
             <a:custGeom>
@@ -2486,7 +2486,7 @@
           </p:nvSpPr>
           <p:spPr>
             <a:xfrm>
-              <a:off x="4460699" y="2073503"/>
+              <a:off x="4460487" y="2073503"/>
               <a:ext cx="0" cy="3649639"/>
             </a:xfrm>
             <a:custGeom>
@@ -2529,7 +2529,7 @@
           </p:nvSpPr>
           <p:spPr>
             <a:xfrm>
-              <a:off x="6978877" y="2073503"/>
+              <a:off x="6977907" y="2073503"/>
               <a:ext cx="0" cy="3649639"/>
             </a:xfrm>
             <a:custGeom>
@@ -2787,7 +2787,7 @@
           </p:nvSpPr>
           <p:spPr>
             <a:xfrm>
-              <a:off x="3201610" y="2073503"/>
+              <a:off x="3201777" y="2073503"/>
               <a:ext cx="0" cy="3649639"/>
             </a:xfrm>
             <a:custGeom>
@@ -2830,7 +2830,7 @@
           </p:nvSpPr>
           <p:spPr>
             <a:xfrm>
-              <a:off x="5719788" y="2073503"/>
+              <a:off x="5719197" y="2073503"/>
               <a:ext cx="0" cy="3649639"/>
             </a:xfrm>
             <a:custGeom>
@@ -2873,7 +2873,7 @@
           </p:nvSpPr>
           <p:spPr>
             <a:xfrm>
-              <a:off x="8237966" y="2073503"/>
+              <a:off x="8236616" y="2073503"/>
               <a:ext cx="0" cy="3649639"/>
             </a:xfrm>
             <a:custGeom>
@@ -2917,518 +2917,518 @@
           <p:spPr>
             <a:xfrm>
               <a:off x="1172049" y="2073503"/>
-              <a:ext cx="7090630" cy="3299070"/>
+              <a:ext cx="7090630" cy="3297696"/>
             </a:xfrm>
             <a:custGeom>
               <a:avLst/>
               <a:pathLst>
-                <a:path w="7090630" h="3299070">
+                <a:path w="7090630" h="3297696">
                   <a:moveTo>
-                    <a:pt x="2243906" y="0"/>
+                    <a:pt x="2250499" y="0"/>
                   </a:moveTo>
                   <a:lnTo>
-                    <a:pt x="2291920" y="100603"/>
-                  </a:lnTo>
-                  <a:lnTo>
-                    <a:pt x="2363543" y="244299"/>
-                  </a:lnTo>
-                  <a:lnTo>
-                    <a:pt x="2435165" y="381891"/>
-                  </a:lnTo>
-                  <a:lnTo>
-                    <a:pt x="2506788" y="513639"/>
-                  </a:lnTo>
-                  <a:lnTo>
-                    <a:pt x="2578410" y="639791"/>
-                  </a:lnTo>
-                  <a:lnTo>
-                    <a:pt x="2650033" y="760585"/>
-                  </a:lnTo>
-                  <a:lnTo>
-                    <a:pt x="2721655" y="876248"/>
-                  </a:lnTo>
-                  <a:lnTo>
-                    <a:pt x="2793278" y="986999"/>
-                  </a:lnTo>
-                  <a:lnTo>
-                    <a:pt x="2864901" y="1093046"/>
-                  </a:lnTo>
-                  <a:lnTo>
-                    <a:pt x="2936523" y="1194588"/>
-                  </a:lnTo>
-                  <a:lnTo>
-                    <a:pt x="3008146" y="1291818"/>
-                  </a:lnTo>
-                  <a:lnTo>
-                    <a:pt x="3079768" y="1384918"/>
-                  </a:lnTo>
-                  <a:lnTo>
-                    <a:pt x="3151391" y="1474063"/>
-                  </a:lnTo>
-                  <a:lnTo>
-                    <a:pt x="3223013" y="1559423"/>
-                  </a:lnTo>
-                  <a:lnTo>
-                    <a:pt x="3294636" y="1641156"/>
-                  </a:lnTo>
-                  <a:lnTo>
-                    <a:pt x="3366258" y="1719418"/>
-                  </a:lnTo>
-                  <a:lnTo>
-                    <a:pt x="3437881" y="1794356"/>
-                  </a:lnTo>
-                  <a:lnTo>
-                    <a:pt x="3509503" y="1866111"/>
-                  </a:lnTo>
-                  <a:lnTo>
-                    <a:pt x="3581126" y="1934819"/>
-                  </a:lnTo>
-                  <a:lnTo>
-                    <a:pt x="3652748" y="2000608"/>
-                  </a:lnTo>
-                  <a:lnTo>
-                    <a:pt x="3724371" y="2063603"/>
-                  </a:lnTo>
-                  <a:lnTo>
-                    <a:pt x="3795993" y="2123922"/>
-                  </a:lnTo>
-                  <a:lnTo>
-                    <a:pt x="3867616" y="2181679"/>
-                  </a:lnTo>
-                  <a:lnTo>
-                    <a:pt x="3939238" y="2236983"/>
-                  </a:lnTo>
-                  <a:lnTo>
-                    <a:pt x="4010861" y="2289938"/>
-                  </a:lnTo>
-                  <a:lnTo>
-                    <a:pt x="4082483" y="2340644"/>
-                  </a:lnTo>
-                  <a:lnTo>
-                    <a:pt x="4154106" y="2389196"/>
-                  </a:lnTo>
-                  <a:lnTo>
-                    <a:pt x="4225729" y="2435686"/>
-                  </a:lnTo>
-                  <a:lnTo>
-                    <a:pt x="4297351" y="2480201"/>
-                  </a:lnTo>
-                  <a:lnTo>
-                    <a:pt x="4368974" y="2522825"/>
-                  </a:lnTo>
-                  <a:lnTo>
-                    <a:pt x="4440596" y="2563639"/>
-                  </a:lnTo>
-                  <a:lnTo>
-                    <a:pt x="4512219" y="2602720"/>
-                  </a:lnTo>
-                  <a:lnTo>
-                    <a:pt x="4583841" y="2640141"/>
-                  </a:lnTo>
-                  <a:lnTo>
-                    <a:pt x="4655464" y="2656195"/>
-                  </a:lnTo>
-                  <a:lnTo>
-                    <a:pt x="4727086" y="2659319"/>
-                  </a:lnTo>
-                  <a:lnTo>
-                    <a:pt x="4798709" y="2662430"/>
-                  </a:lnTo>
-                  <a:lnTo>
-                    <a:pt x="4870331" y="2665530"/>
-                  </a:lnTo>
-                  <a:lnTo>
-                    <a:pt x="4941954" y="2668618"/>
-                  </a:lnTo>
-                  <a:lnTo>
-                    <a:pt x="5013576" y="2671694"/>
-                  </a:lnTo>
-                  <a:lnTo>
-                    <a:pt x="5085199" y="2674759"/>
-                  </a:lnTo>
-                  <a:lnTo>
-                    <a:pt x="5156821" y="2677812"/>
-                  </a:lnTo>
-                  <a:lnTo>
-                    <a:pt x="5228444" y="2680854"/>
-                  </a:lnTo>
-                  <a:lnTo>
-                    <a:pt x="5300066" y="2683884"/>
-                  </a:lnTo>
-                  <a:lnTo>
-                    <a:pt x="5371689" y="2686903"/>
-                  </a:lnTo>
-                  <a:lnTo>
-                    <a:pt x="5443311" y="2689911"/>
-                  </a:lnTo>
-                  <a:lnTo>
-                    <a:pt x="5514934" y="2692907"/>
-                  </a:lnTo>
-                  <a:lnTo>
-                    <a:pt x="5586557" y="2695891"/>
-                  </a:lnTo>
-                  <a:lnTo>
-                    <a:pt x="5658179" y="2698865"/>
-                  </a:lnTo>
-                  <a:lnTo>
-                    <a:pt x="5729802" y="2701827"/>
-                  </a:lnTo>
-                  <a:lnTo>
-                    <a:pt x="5801424" y="2704778"/>
-                  </a:lnTo>
-                  <a:lnTo>
-                    <a:pt x="5873047" y="2707718"/>
-                  </a:lnTo>
-                  <a:lnTo>
-                    <a:pt x="5944669" y="2710647"/>
-                  </a:lnTo>
-                  <a:lnTo>
-                    <a:pt x="6016292" y="2713565"/>
-                  </a:lnTo>
-                  <a:lnTo>
-                    <a:pt x="6087914" y="2716472"/>
-                  </a:lnTo>
-                  <a:lnTo>
-                    <a:pt x="6159537" y="2719367"/>
-                  </a:lnTo>
-                  <a:lnTo>
-                    <a:pt x="6231159" y="2722252"/>
-                  </a:lnTo>
-                  <a:lnTo>
-                    <a:pt x="6302782" y="2725126"/>
-                  </a:lnTo>
-                  <a:lnTo>
-                    <a:pt x="6374404" y="2727989"/>
-                  </a:lnTo>
-                  <a:lnTo>
-                    <a:pt x="6446027" y="2730842"/>
-                  </a:lnTo>
-                  <a:lnTo>
-                    <a:pt x="6517649" y="2733683"/>
-                  </a:lnTo>
-                  <a:lnTo>
-                    <a:pt x="6589272" y="2736514"/>
-                  </a:lnTo>
-                  <a:lnTo>
-                    <a:pt x="6660894" y="2739334"/>
-                  </a:lnTo>
-                  <a:lnTo>
-                    <a:pt x="6732517" y="2742144"/>
-                  </a:lnTo>
-                  <a:lnTo>
-                    <a:pt x="6804139" y="2744943"/>
-                  </a:lnTo>
-                  <a:lnTo>
-                    <a:pt x="6875762" y="2747731"/>
-                  </a:lnTo>
-                  <a:lnTo>
-                    <a:pt x="6947385" y="2750509"/>
-                  </a:lnTo>
-                  <a:lnTo>
-                    <a:pt x="7019007" y="2753276"/>
-                  </a:lnTo>
-                  <a:lnTo>
-                    <a:pt x="7090630" y="2756033"/>
-                  </a:lnTo>
-                  <a:lnTo>
-                    <a:pt x="7090630" y="3299070"/>
-                  </a:lnTo>
-                  <a:lnTo>
-                    <a:pt x="7019007" y="3290879"/>
-                  </a:lnTo>
-                  <a:lnTo>
-                    <a:pt x="6947385" y="3282323"/>
-                  </a:lnTo>
-                  <a:lnTo>
-                    <a:pt x="6875762" y="3273389"/>
-                  </a:lnTo>
-                  <a:lnTo>
-                    <a:pt x="6804139" y="3264058"/>
-                  </a:lnTo>
-                  <a:lnTo>
-                    <a:pt x="6732517" y="3254313"/>
-                  </a:lnTo>
-                  <a:lnTo>
-                    <a:pt x="6660894" y="3244135"/>
-                  </a:lnTo>
-                  <a:lnTo>
-                    <a:pt x="6589272" y="3233507"/>
-                  </a:lnTo>
-                  <a:lnTo>
-                    <a:pt x="6517649" y="3222407"/>
-                  </a:lnTo>
-                  <a:lnTo>
-                    <a:pt x="6446027" y="3210814"/>
-                  </a:lnTo>
-                  <a:lnTo>
-                    <a:pt x="6374404" y="3198707"/>
-                  </a:lnTo>
-                  <a:lnTo>
-                    <a:pt x="6302782" y="3186064"/>
-                  </a:lnTo>
-                  <a:lnTo>
-                    <a:pt x="6231159" y="3172859"/>
-                  </a:lnTo>
-                  <a:lnTo>
-                    <a:pt x="6159537" y="3159069"/>
-                  </a:lnTo>
-                  <a:lnTo>
-                    <a:pt x="6087914" y="3144667"/>
-                  </a:lnTo>
-                  <a:lnTo>
-                    <a:pt x="6016292" y="3129626"/>
-                  </a:lnTo>
-                  <a:lnTo>
-                    <a:pt x="5944669" y="3113918"/>
-                  </a:lnTo>
-                  <a:lnTo>
-                    <a:pt x="5873047" y="3097513"/>
-                  </a:lnTo>
-                  <a:lnTo>
-                    <a:pt x="5801424" y="3080380"/>
-                  </a:lnTo>
-                  <a:lnTo>
-                    <a:pt x="5729802" y="3062488"/>
-                  </a:lnTo>
-                  <a:lnTo>
-                    <a:pt x="5658179" y="3043801"/>
-                  </a:lnTo>
-                  <a:lnTo>
-                    <a:pt x="5586557" y="3024286"/>
-                  </a:lnTo>
-                  <a:lnTo>
-                    <a:pt x="5514934" y="3003906"/>
-                  </a:lnTo>
-                  <a:lnTo>
-                    <a:pt x="5443311" y="2982621"/>
-                  </a:lnTo>
-                  <a:lnTo>
-                    <a:pt x="5371689" y="2960392"/>
-                  </a:lnTo>
-                  <a:lnTo>
-                    <a:pt x="5300066" y="2937177"/>
-                  </a:lnTo>
-                  <a:lnTo>
-                    <a:pt x="5228444" y="2912932"/>
-                  </a:lnTo>
-                  <a:lnTo>
-                    <a:pt x="5156821" y="2887612"/>
-                  </a:lnTo>
-                  <a:lnTo>
-                    <a:pt x="5085199" y="2861169"/>
-                  </a:lnTo>
-                  <a:lnTo>
-                    <a:pt x="5013576" y="2833552"/>
-                  </a:lnTo>
-                  <a:lnTo>
-                    <a:pt x="4941954" y="2804711"/>
-                  </a:lnTo>
-                  <a:lnTo>
-                    <a:pt x="4870331" y="2774590"/>
-                  </a:lnTo>
-                  <a:lnTo>
-                    <a:pt x="4798709" y="2743133"/>
-                  </a:lnTo>
-                  <a:lnTo>
-                    <a:pt x="4727086" y="2710281"/>
-                  </a:lnTo>
-                  <a:lnTo>
-                    <a:pt x="4655464" y="2675972"/>
-                  </a:lnTo>
-                  <a:lnTo>
-                    <a:pt x="4583841" y="2653060"/>
-                  </a:lnTo>
-                  <a:lnTo>
-                    <a:pt x="4512219" y="2649913"/>
-                  </a:lnTo>
-                  <a:lnTo>
-                    <a:pt x="4440596" y="2646754"/>
-                  </a:lnTo>
-                  <a:lnTo>
-                    <a:pt x="4368974" y="2643583"/>
-                  </a:lnTo>
-                  <a:lnTo>
-                    <a:pt x="4297351" y="2640401"/>
-                  </a:lnTo>
-                  <a:lnTo>
-                    <a:pt x="4225729" y="2637206"/>
-                  </a:lnTo>
-                  <a:lnTo>
-                    <a:pt x="4154106" y="2633998"/>
-                  </a:lnTo>
-                  <a:lnTo>
-                    <a:pt x="4082483" y="2630779"/>
-                  </a:lnTo>
-                  <a:lnTo>
-                    <a:pt x="4010861" y="2627548"/>
-                  </a:lnTo>
-                  <a:lnTo>
-                    <a:pt x="3939238" y="2624304"/>
-                  </a:lnTo>
-                  <a:lnTo>
-                    <a:pt x="3867616" y="2621048"/>
-                  </a:lnTo>
-                  <a:lnTo>
-                    <a:pt x="3795993" y="2617780"/>
-                  </a:lnTo>
-                  <a:lnTo>
-                    <a:pt x="3724371" y="2614499"/>
-                  </a:lnTo>
-                  <a:lnTo>
-                    <a:pt x="3652748" y="2611206"/>
-                  </a:lnTo>
-                  <a:lnTo>
-                    <a:pt x="3581126" y="2607901"/>
-                  </a:lnTo>
-                  <a:lnTo>
-                    <a:pt x="3509503" y="2604583"/>
-                  </a:lnTo>
-                  <a:lnTo>
-                    <a:pt x="3437881" y="2601252"/>
-                  </a:lnTo>
-                  <a:lnTo>
-                    <a:pt x="3366258" y="2597909"/>
-                  </a:lnTo>
-                  <a:lnTo>
-                    <a:pt x="3294636" y="2594553"/>
-                  </a:lnTo>
-                  <a:lnTo>
-                    <a:pt x="3223013" y="2591184"/>
-                  </a:lnTo>
-                  <a:lnTo>
-                    <a:pt x="3151391" y="2587803"/>
-                  </a:lnTo>
-                  <a:lnTo>
-                    <a:pt x="3079768" y="2584408"/>
-                  </a:lnTo>
-                  <a:lnTo>
-                    <a:pt x="3008146" y="2581001"/>
-                  </a:lnTo>
-                  <a:lnTo>
-                    <a:pt x="2936523" y="2577581"/>
-                  </a:lnTo>
-                  <a:lnTo>
-                    <a:pt x="2864901" y="2574148"/>
-                  </a:lnTo>
-                  <a:lnTo>
-                    <a:pt x="2793278" y="2570702"/>
-                  </a:lnTo>
-                  <a:lnTo>
-                    <a:pt x="2721655" y="2567243"/>
-                  </a:lnTo>
-                  <a:lnTo>
-                    <a:pt x="2650033" y="2563771"/>
-                  </a:lnTo>
-                  <a:lnTo>
-                    <a:pt x="2578410" y="2560286"/>
-                  </a:lnTo>
-                  <a:lnTo>
-                    <a:pt x="2506788" y="2556787"/>
-                  </a:lnTo>
-                  <a:lnTo>
-                    <a:pt x="2435165" y="2553276"/>
-                  </a:lnTo>
-                  <a:lnTo>
-                    <a:pt x="2363543" y="2549751"/>
-                  </a:lnTo>
-                  <a:lnTo>
-                    <a:pt x="2291920" y="2546212"/>
-                  </a:lnTo>
-                  <a:lnTo>
-                    <a:pt x="2220298" y="2542660"/>
-                  </a:lnTo>
-                  <a:lnTo>
-                    <a:pt x="2148675" y="2539095"/>
-                  </a:lnTo>
-                  <a:lnTo>
-                    <a:pt x="2077053" y="2535516"/>
-                  </a:lnTo>
-                  <a:lnTo>
-                    <a:pt x="2005430" y="2531924"/>
-                  </a:lnTo>
-                  <a:lnTo>
-                    <a:pt x="1933808" y="2528318"/>
-                  </a:lnTo>
-                  <a:lnTo>
-                    <a:pt x="1862185" y="2524699"/>
-                  </a:lnTo>
-                  <a:lnTo>
-                    <a:pt x="1790563" y="2521065"/>
-                  </a:lnTo>
-                  <a:lnTo>
-                    <a:pt x="1718940" y="2517418"/>
-                  </a:lnTo>
-                  <a:lnTo>
-                    <a:pt x="1647318" y="2513757"/>
-                  </a:lnTo>
-                  <a:lnTo>
-                    <a:pt x="1575695" y="2510083"/>
-                  </a:lnTo>
-                  <a:lnTo>
-                    <a:pt x="1504073" y="2506394"/>
-                  </a:lnTo>
-                  <a:lnTo>
-                    <a:pt x="1432450" y="2502691"/>
-                  </a:lnTo>
-                  <a:lnTo>
-                    <a:pt x="1360827" y="2498975"/>
-                  </a:lnTo>
-                  <a:lnTo>
-                    <a:pt x="1289205" y="2495244"/>
-                  </a:lnTo>
-                  <a:lnTo>
-                    <a:pt x="1217582" y="2491499"/>
-                  </a:lnTo>
-                  <a:lnTo>
-                    <a:pt x="1145960" y="2487740"/>
-                  </a:lnTo>
-                  <a:lnTo>
-                    <a:pt x="1074337" y="2483967"/>
-                  </a:lnTo>
-                  <a:lnTo>
-                    <a:pt x="1002715" y="2480179"/>
-                  </a:lnTo>
-                  <a:lnTo>
-                    <a:pt x="931092" y="2476377"/>
-                  </a:lnTo>
-                  <a:lnTo>
-                    <a:pt x="859470" y="2472561"/>
-                  </a:lnTo>
-                  <a:lnTo>
-                    <a:pt x="787847" y="2468730"/>
-                  </a:lnTo>
-                  <a:lnTo>
-                    <a:pt x="716225" y="2464885"/>
-                  </a:lnTo>
-                  <a:lnTo>
-                    <a:pt x="644602" y="2461025"/>
-                  </a:lnTo>
-                  <a:lnTo>
-                    <a:pt x="572980" y="2457150"/>
-                  </a:lnTo>
-                  <a:lnTo>
-                    <a:pt x="501357" y="2453261"/>
-                  </a:lnTo>
-                  <a:lnTo>
-                    <a:pt x="429735" y="2449357"/>
-                  </a:lnTo>
-                  <a:lnTo>
-                    <a:pt x="358112" y="2445438"/>
-                  </a:lnTo>
-                  <a:lnTo>
-                    <a:pt x="286490" y="2441505"/>
-                  </a:lnTo>
-                  <a:lnTo>
-                    <a:pt x="214867" y="2437556"/>
-                  </a:lnTo>
-                  <a:lnTo>
-                    <a:pt x="143245" y="2433593"/>
-                  </a:lnTo>
-                  <a:lnTo>
-                    <a:pt x="71622" y="2429614"/>
-                  </a:lnTo>
-                  <a:lnTo>
-                    <a:pt x="0" y="2425621"/>
+                    <a:pt x="2291920" y="87033"/>
+                  </a:lnTo>
+                  <a:lnTo>
+                    <a:pt x="2363543" y="231139"/>
+                  </a:lnTo>
+                  <a:lnTo>
+                    <a:pt x="2435165" y="369132"/>
+                  </a:lnTo>
+                  <a:lnTo>
+                    <a:pt x="2506788" y="501270"/>
+                  </a:lnTo>
+                  <a:lnTo>
+                    <a:pt x="2578410" y="627802"/>
+                  </a:lnTo>
+                  <a:lnTo>
+                    <a:pt x="2650033" y="748966"/>
+                  </a:lnTo>
+                  <a:lnTo>
+                    <a:pt x="2721655" y="864989"/>
+                  </a:lnTo>
+                  <a:lnTo>
+                    <a:pt x="2793278" y="976090"/>
+                  </a:lnTo>
+                  <a:lnTo>
+                    <a:pt x="2864901" y="1082478"/>
+                  </a:lnTo>
+                  <a:lnTo>
+                    <a:pt x="2936523" y="1184352"/>
+                  </a:lnTo>
+                  <a:lnTo>
+                    <a:pt x="3008146" y="1281904"/>
+                  </a:lnTo>
+                  <a:lnTo>
+                    <a:pt x="3079768" y="1375318"/>
+                  </a:lnTo>
+                  <a:lnTo>
+                    <a:pt x="3151391" y="1464768"/>
+                  </a:lnTo>
+                  <a:lnTo>
+                    <a:pt x="3223013" y="1550424"/>
+                  </a:lnTo>
+                  <a:lnTo>
+                    <a:pt x="3294636" y="1632445"/>
+                  </a:lnTo>
+                  <a:lnTo>
+                    <a:pt x="3366258" y="1710987"/>
+                  </a:lnTo>
+                  <a:lnTo>
+                    <a:pt x="3437881" y="1786197"/>
+                  </a:lnTo>
+                  <a:lnTo>
+                    <a:pt x="3509503" y="1858215"/>
+                  </a:lnTo>
+                  <a:lnTo>
+                    <a:pt x="3581126" y="1927179"/>
+                  </a:lnTo>
+                  <a:lnTo>
+                    <a:pt x="3652748" y="1993217"/>
+                  </a:lnTo>
+                  <a:lnTo>
+                    <a:pt x="3724371" y="2056452"/>
+                  </a:lnTo>
+                  <a:lnTo>
+                    <a:pt x="3795993" y="2117006"/>
+                  </a:lnTo>
+                  <a:lnTo>
+                    <a:pt x="3867616" y="2174990"/>
+                  </a:lnTo>
+                  <a:lnTo>
+                    <a:pt x="3939238" y="2230514"/>
+                  </a:lnTo>
+                  <a:lnTo>
+                    <a:pt x="4010861" y="2283683"/>
+                  </a:lnTo>
+                  <a:lnTo>
+                    <a:pt x="4082483" y="2334596"/>
+                  </a:lnTo>
+                  <a:lnTo>
+                    <a:pt x="4154106" y="2383348"/>
+                  </a:lnTo>
+                  <a:lnTo>
+                    <a:pt x="4225729" y="2430033"/>
+                  </a:lnTo>
+                  <a:lnTo>
+                    <a:pt x="4297351" y="2474737"/>
+                  </a:lnTo>
+                  <a:lnTo>
+                    <a:pt x="4368974" y="2517544"/>
+                  </a:lnTo>
+                  <a:lnTo>
+                    <a:pt x="4440596" y="2558536"/>
+                  </a:lnTo>
+                  <a:lnTo>
+                    <a:pt x="4512219" y="2597788"/>
+                  </a:lnTo>
+                  <a:lnTo>
+                    <a:pt x="4583841" y="2635375"/>
+                  </a:lnTo>
+                  <a:lnTo>
+                    <a:pt x="4655464" y="2655614"/>
+                  </a:lnTo>
+                  <a:lnTo>
+                    <a:pt x="4727086" y="2658379"/>
+                  </a:lnTo>
+                  <a:lnTo>
+                    <a:pt x="4798709" y="2661135"/>
+                  </a:lnTo>
+                  <a:lnTo>
+                    <a:pt x="4870331" y="2663882"/>
+                  </a:lnTo>
+                  <a:lnTo>
+                    <a:pt x="4941954" y="2666619"/>
+                  </a:lnTo>
+                  <a:lnTo>
+                    <a:pt x="5013576" y="2669348"/>
+                  </a:lnTo>
+                  <a:lnTo>
+                    <a:pt x="5085199" y="2672067"/>
+                  </a:lnTo>
+                  <a:lnTo>
+                    <a:pt x="5156821" y="2674777"/>
+                  </a:lnTo>
+                  <a:lnTo>
+                    <a:pt x="5228444" y="2677479"/>
+                  </a:lnTo>
+                  <a:lnTo>
+                    <a:pt x="5300066" y="2680171"/>
+                  </a:lnTo>
+                  <a:lnTo>
+                    <a:pt x="5371689" y="2682854"/>
+                  </a:lnTo>
+                  <a:lnTo>
+                    <a:pt x="5443311" y="2685528"/>
+                  </a:lnTo>
+                  <a:lnTo>
+                    <a:pt x="5514934" y="2688194"/>
+                  </a:lnTo>
+                  <a:lnTo>
+                    <a:pt x="5586557" y="2690850"/>
+                  </a:lnTo>
+                  <a:lnTo>
+                    <a:pt x="5658179" y="2693498"/>
+                  </a:lnTo>
+                  <a:lnTo>
+                    <a:pt x="5729802" y="2696136"/>
+                  </a:lnTo>
+                  <a:lnTo>
+                    <a:pt x="5801424" y="2698766"/>
+                  </a:lnTo>
+                  <a:lnTo>
+                    <a:pt x="5873047" y="2701388"/>
+                  </a:lnTo>
+                  <a:lnTo>
+                    <a:pt x="5944669" y="2704000"/>
+                  </a:lnTo>
+                  <a:lnTo>
+                    <a:pt x="6016292" y="2706604"/>
+                  </a:lnTo>
+                  <a:lnTo>
+                    <a:pt x="6087914" y="2709199"/>
+                  </a:lnTo>
+                  <a:lnTo>
+                    <a:pt x="6159537" y="2711785"/>
+                  </a:lnTo>
+                  <a:lnTo>
+                    <a:pt x="6231159" y="2714362"/>
+                  </a:lnTo>
+                  <a:lnTo>
+                    <a:pt x="6302782" y="2716932"/>
+                  </a:lnTo>
+                  <a:lnTo>
+                    <a:pt x="6374404" y="2719492"/>
+                  </a:lnTo>
+                  <a:lnTo>
+                    <a:pt x="6446027" y="2722044"/>
+                  </a:lnTo>
+                  <a:lnTo>
+                    <a:pt x="6517649" y="2724587"/>
+                  </a:lnTo>
+                  <a:lnTo>
+                    <a:pt x="6589272" y="2727122"/>
+                  </a:lnTo>
+                  <a:lnTo>
+                    <a:pt x="6660894" y="2729649"/>
+                  </a:lnTo>
+                  <a:lnTo>
+                    <a:pt x="6732517" y="2732167"/>
+                  </a:lnTo>
+                  <a:lnTo>
+                    <a:pt x="6804139" y="2734676"/>
+                  </a:lnTo>
+                  <a:lnTo>
+                    <a:pt x="6875762" y="2737178"/>
+                  </a:lnTo>
+                  <a:lnTo>
+                    <a:pt x="6947385" y="2739670"/>
+                  </a:lnTo>
+                  <a:lnTo>
+                    <a:pt x="7019007" y="2742155"/>
+                  </a:lnTo>
+                  <a:lnTo>
+                    <a:pt x="7090630" y="2744631"/>
+                  </a:lnTo>
+                  <a:lnTo>
+                    <a:pt x="7090630" y="3297696"/>
+                  </a:lnTo>
+                  <a:lnTo>
+                    <a:pt x="7019007" y="3289453"/>
+                  </a:lnTo>
+                  <a:lnTo>
+                    <a:pt x="6947385" y="3280845"/>
+                  </a:lnTo>
+                  <a:lnTo>
+                    <a:pt x="6875762" y="3271855"/>
+                  </a:lnTo>
+                  <a:lnTo>
+                    <a:pt x="6804139" y="3262467"/>
+                  </a:lnTo>
+                  <a:lnTo>
+                    <a:pt x="6732517" y="3252663"/>
+                  </a:lnTo>
+                  <a:lnTo>
+                    <a:pt x="6660894" y="3242425"/>
+                  </a:lnTo>
+                  <a:lnTo>
+                    <a:pt x="6589272" y="3231734"/>
+                  </a:lnTo>
+                  <a:lnTo>
+                    <a:pt x="6517649" y="3220568"/>
+                  </a:lnTo>
+                  <a:lnTo>
+                    <a:pt x="6446027" y="3208908"/>
+                  </a:lnTo>
+                  <a:lnTo>
+                    <a:pt x="6374404" y="3196732"/>
+                  </a:lnTo>
+                  <a:lnTo>
+                    <a:pt x="6302782" y="3184015"/>
+                  </a:lnTo>
+                  <a:lnTo>
+                    <a:pt x="6231159" y="3170736"/>
+                  </a:lnTo>
+                  <a:lnTo>
+                    <a:pt x="6159537" y="3156868"/>
+                  </a:lnTo>
+                  <a:lnTo>
+                    <a:pt x="6087914" y="3142386"/>
+                  </a:lnTo>
+                  <a:lnTo>
+                    <a:pt x="6016292" y="3127262"/>
+                  </a:lnTo>
+                  <a:lnTo>
+                    <a:pt x="5944669" y="3111468"/>
+                  </a:lnTo>
+                  <a:lnTo>
+                    <a:pt x="5873047" y="3094974"/>
+                  </a:lnTo>
+                  <a:lnTo>
+                    <a:pt x="5801424" y="3077750"/>
+                  </a:lnTo>
+                  <a:lnTo>
+                    <a:pt x="5729802" y="3059762"/>
+                  </a:lnTo>
+                  <a:lnTo>
+                    <a:pt x="5658179" y="3040978"/>
+                  </a:lnTo>
+                  <a:lnTo>
+                    <a:pt x="5586557" y="3021361"/>
+                  </a:lnTo>
+                  <a:lnTo>
+                    <a:pt x="5514934" y="3000875"/>
+                  </a:lnTo>
+                  <a:lnTo>
+                    <a:pt x="5443311" y="2979481"/>
+                  </a:lnTo>
+                  <a:lnTo>
+                    <a:pt x="5371689" y="2957140"/>
+                  </a:lnTo>
+                  <a:lnTo>
+                    <a:pt x="5300066" y="2933809"/>
+                  </a:lnTo>
+                  <a:lnTo>
+                    <a:pt x="5228444" y="2909444"/>
+                  </a:lnTo>
+                  <a:lnTo>
+                    <a:pt x="5156821" y="2884000"/>
+                  </a:lnTo>
+                  <a:lnTo>
+                    <a:pt x="5085199" y="2857428"/>
+                  </a:lnTo>
+                  <a:lnTo>
+                    <a:pt x="5013576" y="2829679"/>
+                  </a:lnTo>
+                  <a:lnTo>
+                    <a:pt x="4941954" y="2800701"/>
+                  </a:lnTo>
+                  <a:lnTo>
+                    <a:pt x="4870331" y="2770439"/>
+                  </a:lnTo>
+                  <a:lnTo>
+                    <a:pt x="4798709" y="2738836"/>
+                  </a:lnTo>
+                  <a:lnTo>
+                    <a:pt x="4727086" y="2705832"/>
+                  </a:lnTo>
+                  <a:lnTo>
+                    <a:pt x="4655464" y="2671367"/>
+                  </a:lnTo>
+                  <a:lnTo>
+                    <a:pt x="4583841" y="2652839"/>
+                  </a:lnTo>
+                  <a:lnTo>
+                    <a:pt x="4512219" y="2650055"/>
+                  </a:lnTo>
+                  <a:lnTo>
+                    <a:pt x="4440596" y="2647262"/>
+                  </a:lnTo>
+                  <a:lnTo>
+                    <a:pt x="4368974" y="2644460"/>
+                  </a:lnTo>
+                  <a:lnTo>
+                    <a:pt x="4297351" y="2641648"/>
+                  </a:lnTo>
+                  <a:lnTo>
+                    <a:pt x="4225729" y="2638827"/>
+                  </a:lnTo>
+                  <a:lnTo>
+                    <a:pt x="4154106" y="2635996"/>
+                  </a:lnTo>
+                  <a:lnTo>
+                    <a:pt x="4082483" y="2633156"/>
+                  </a:lnTo>
+                  <a:lnTo>
+                    <a:pt x="4010861" y="2630306"/>
+                  </a:lnTo>
+                  <a:lnTo>
+                    <a:pt x="3939238" y="2627447"/>
+                  </a:lnTo>
+                  <a:lnTo>
+                    <a:pt x="3867616" y="2624578"/>
+                  </a:lnTo>
+                  <a:lnTo>
+                    <a:pt x="3795993" y="2621699"/>
+                  </a:lnTo>
+                  <a:lnTo>
+                    <a:pt x="3724371" y="2618811"/>
+                  </a:lnTo>
+                  <a:lnTo>
+                    <a:pt x="3652748" y="2615913"/>
+                  </a:lnTo>
+                  <a:lnTo>
+                    <a:pt x="3581126" y="2613006"/>
+                  </a:lnTo>
+                  <a:lnTo>
+                    <a:pt x="3509503" y="2610089"/>
+                  </a:lnTo>
+                  <a:lnTo>
+                    <a:pt x="3437881" y="2607162"/>
+                  </a:lnTo>
+                  <a:lnTo>
+                    <a:pt x="3366258" y="2604225"/>
+                  </a:lnTo>
+                  <a:lnTo>
+                    <a:pt x="3294636" y="2601278"/>
+                  </a:lnTo>
+                  <a:lnTo>
+                    <a:pt x="3223013" y="2598322"/>
+                  </a:lnTo>
+                  <a:lnTo>
+                    <a:pt x="3151391" y="2595355"/>
+                  </a:lnTo>
+                  <a:lnTo>
+                    <a:pt x="3079768" y="2592379"/>
+                  </a:lnTo>
+                  <a:lnTo>
+                    <a:pt x="3008146" y="2589393"/>
+                  </a:lnTo>
+                  <a:lnTo>
+                    <a:pt x="2936523" y="2586396"/>
+                  </a:lnTo>
+                  <a:lnTo>
+                    <a:pt x="2864901" y="2583390"/>
+                  </a:lnTo>
+                  <a:lnTo>
+                    <a:pt x="2793278" y="2580373"/>
+                  </a:lnTo>
+                  <a:lnTo>
+                    <a:pt x="2721655" y="2577347"/>
+                  </a:lnTo>
+                  <a:lnTo>
+                    <a:pt x="2650033" y="2574310"/>
+                  </a:lnTo>
+                  <a:lnTo>
+                    <a:pt x="2578410" y="2571263"/>
+                  </a:lnTo>
+                  <a:lnTo>
+                    <a:pt x="2506788" y="2568206"/>
+                  </a:lnTo>
+                  <a:lnTo>
+                    <a:pt x="2435165" y="2565139"/>
+                  </a:lnTo>
+                  <a:lnTo>
+                    <a:pt x="2363543" y="2562061"/>
+                  </a:lnTo>
+                  <a:lnTo>
+                    <a:pt x="2291920" y="2558973"/>
+                  </a:lnTo>
+                  <a:lnTo>
+                    <a:pt x="2220298" y="2555875"/>
+                  </a:lnTo>
+                  <a:lnTo>
+                    <a:pt x="2148675" y="2552766"/>
+                  </a:lnTo>
+                  <a:lnTo>
+                    <a:pt x="2077053" y="2549647"/>
+                  </a:lnTo>
+                  <a:lnTo>
+                    <a:pt x="2005430" y="2546518"/>
+                  </a:lnTo>
+                  <a:lnTo>
+                    <a:pt x="1933808" y="2543378"/>
+                  </a:lnTo>
+                  <a:lnTo>
+                    <a:pt x="1862185" y="2540227"/>
+                  </a:lnTo>
+                  <a:lnTo>
+                    <a:pt x="1790563" y="2537066"/>
+                  </a:lnTo>
+                  <a:lnTo>
+                    <a:pt x="1718940" y="2533894"/>
+                  </a:lnTo>
+                  <a:lnTo>
+                    <a:pt x="1647318" y="2530712"/>
+                  </a:lnTo>
+                  <a:lnTo>
+                    <a:pt x="1575695" y="2527519"/>
+                  </a:lnTo>
+                  <a:lnTo>
+                    <a:pt x="1504073" y="2524316"/>
+                  </a:lnTo>
+                  <a:lnTo>
+                    <a:pt x="1432450" y="2521101"/>
+                  </a:lnTo>
+                  <a:lnTo>
+                    <a:pt x="1360827" y="2517876"/>
+                  </a:lnTo>
+                  <a:lnTo>
+                    <a:pt x="1289205" y="2514640"/>
+                  </a:lnTo>
+                  <a:lnTo>
+                    <a:pt x="1217582" y="2511393"/>
+                  </a:lnTo>
+                  <a:lnTo>
+                    <a:pt x="1145960" y="2508136"/>
+                  </a:lnTo>
+                  <a:lnTo>
+                    <a:pt x="1074337" y="2504867"/>
+                  </a:lnTo>
+                  <a:lnTo>
+                    <a:pt x="1002715" y="2501588"/>
+                  </a:lnTo>
+                  <a:lnTo>
+                    <a:pt x="931092" y="2498297"/>
+                  </a:lnTo>
+                  <a:lnTo>
+                    <a:pt x="859470" y="2494995"/>
+                  </a:lnTo>
+                  <a:lnTo>
+                    <a:pt x="787847" y="2491683"/>
+                  </a:lnTo>
+                  <a:lnTo>
+                    <a:pt x="716225" y="2488359"/>
+                  </a:lnTo>
+                  <a:lnTo>
+                    <a:pt x="644602" y="2485024"/>
+                  </a:lnTo>
+                  <a:lnTo>
+                    <a:pt x="572980" y="2481678"/>
+                  </a:lnTo>
+                  <a:lnTo>
+                    <a:pt x="501357" y="2478321"/>
+                  </a:lnTo>
+                  <a:lnTo>
+                    <a:pt x="429735" y="2474953"/>
+                  </a:lnTo>
+                  <a:lnTo>
+                    <a:pt x="358112" y="2471573"/>
+                  </a:lnTo>
+                  <a:lnTo>
+                    <a:pt x="286490" y="2468182"/>
+                  </a:lnTo>
+                  <a:lnTo>
+                    <a:pt x="214867" y="2464779"/>
+                  </a:lnTo>
+                  <a:lnTo>
+                    <a:pt x="143245" y="2461365"/>
+                  </a:lnTo>
+                  <a:lnTo>
+                    <a:pt x="71622" y="2457940"/>
+                  </a:lnTo>
+                  <a:lnTo>
+                    <a:pt x="0" y="2454503"/>
                   </a:lnTo>
                   <a:close/>
                 </a:path>
@@ -3454,219 +3454,219 @@
           </p:nvSpPr>
           <p:spPr>
             <a:xfrm>
-              <a:off x="3415955" y="2073503"/>
-              <a:ext cx="4846723" cy="2756033"/>
+              <a:off x="3422548" y="2073503"/>
+              <a:ext cx="4840130" cy="2744631"/>
             </a:xfrm>
             <a:custGeom>
               <a:avLst/>
               <a:pathLst>
-                <a:path w="4846723" h="2756033">
+                <a:path w="4840130" h="2744631">
                   <a:moveTo>
                     <a:pt x="0" y="0"/>
                   </a:moveTo>
                   <a:lnTo>
-                    <a:pt x="48014" y="100603"/>
-                  </a:lnTo>
-                  <a:lnTo>
-                    <a:pt x="119636" y="244299"/>
-                  </a:lnTo>
-                  <a:lnTo>
-                    <a:pt x="191259" y="381891"/>
-                  </a:lnTo>
-                  <a:lnTo>
-                    <a:pt x="262881" y="513639"/>
-                  </a:lnTo>
-                  <a:lnTo>
-                    <a:pt x="334504" y="639791"/>
-                  </a:lnTo>
-                  <a:lnTo>
-                    <a:pt x="406126" y="760585"/>
-                  </a:lnTo>
-                  <a:lnTo>
-                    <a:pt x="477749" y="876248"/>
-                  </a:lnTo>
-                  <a:lnTo>
-                    <a:pt x="549371" y="986999"/>
-                  </a:lnTo>
-                  <a:lnTo>
-                    <a:pt x="620994" y="1093046"/>
-                  </a:lnTo>
-                  <a:lnTo>
-                    <a:pt x="692617" y="1194588"/>
-                  </a:lnTo>
-                  <a:lnTo>
-                    <a:pt x="764239" y="1291818"/>
-                  </a:lnTo>
-                  <a:lnTo>
-                    <a:pt x="835862" y="1384918"/>
-                  </a:lnTo>
-                  <a:lnTo>
-                    <a:pt x="907484" y="1474063"/>
-                  </a:lnTo>
-                  <a:lnTo>
-                    <a:pt x="979107" y="1559423"/>
-                  </a:lnTo>
-                  <a:lnTo>
-                    <a:pt x="1050729" y="1641156"/>
-                  </a:lnTo>
-                  <a:lnTo>
-                    <a:pt x="1122352" y="1719418"/>
-                  </a:lnTo>
-                  <a:lnTo>
-                    <a:pt x="1193974" y="1794356"/>
-                  </a:lnTo>
-                  <a:lnTo>
-                    <a:pt x="1265597" y="1866111"/>
-                  </a:lnTo>
-                  <a:lnTo>
-                    <a:pt x="1337219" y="1934819"/>
-                  </a:lnTo>
-                  <a:lnTo>
-                    <a:pt x="1408842" y="2000608"/>
-                  </a:lnTo>
-                  <a:lnTo>
-                    <a:pt x="1480464" y="2063603"/>
-                  </a:lnTo>
-                  <a:lnTo>
-                    <a:pt x="1552087" y="2123922"/>
-                  </a:lnTo>
-                  <a:lnTo>
-                    <a:pt x="1623709" y="2181679"/>
-                  </a:lnTo>
-                  <a:lnTo>
-                    <a:pt x="1695332" y="2236983"/>
-                  </a:lnTo>
-                  <a:lnTo>
-                    <a:pt x="1766954" y="2289938"/>
-                  </a:lnTo>
-                  <a:lnTo>
-                    <a:pt x="1838577" y="2340644"/>
-                  </a:lnTo>
-                  <a:lnTo>
-                    <a:pt x="1910199" y="2389196"/>
-                  </a:lnTo>
-                  <a:lnTo>
-                    <a:pt x="1981822" y="2435686"/>
-                  </a:lnTo>
-                  <a:lnTo>
-                    <a:pt x="2053445" y="2480201"/>
-                  </a:lnTo>
-                  <a:lnTo>
-                    <a:pt x="2125067" y="2522825"/>
-                  </a:lnTo>
-                  <a:lnTo>
-                    <a:pt x="2196690" y="2563639"/>
-                  </a:lnTo>
-                  <a:lnTo>
-                    <a:pt x="2268312" y="2602720"/>
-                  </a:lnTo>
-                  <a:lnTo>
-                    <a:pt x="2339935" y="2640141"/>
-                  </a:lnTo>
-                  <a:lnTo>
-                    <a:pt x="2411557" y="2656195"/>
-                  </a:lnTo>
-                  <a:lnTo>
-                    <a:pt x="2483180" y="2659319"/>
-                  </a:lnTo>
-                  <a:lnTo>
-                    <a:pt x="2554802" y="2662430"/>
-                  </a:lnTo>
-                  <a:lnTo>
-                    <a:pt x="2626425" y="2665530"/>
-                  </a:lnTo>
-                  <a:lnTo>
-                    <a:pt x="2698047" y="2668618"/>
-                  </a:lnTo>
-                  <a:lnTo>
-                    <a:pt x="2769670" y="2671694"/>
-                  </a:lnTo>
-                  <a:lnTo>
-                    <a:pt x="2841292" y="2674759"/>
-                  </a:lnTo>
-                  <a:lnTo>
-                    <a:pt x="2912915" y="2677812"/>
-                  </a:lnTo>
-                  <a:lnTo>
-                    <a:pt x="2984537" y="2680854"/>
-                  </a:lnTo>
-                  <a:lnTo>
-                    <a:pt x="3056160" y="2683884"/>
-                  </a:lnTo>
-                  <a:lnTo>
-                    <a:pt x="3127782" y="2686903"/>
-                  </a:lnTo>
-                  <a:lnTo>
-                    <a:pt x="3199405" y="2689911"/>
-                  </a:lnTo>
-                  <a:lnTo>
-                    <a:pt x="3271027" y="2692907"/>
-                  </a:lnTo>
-                  <a:lnTo>
-                    <a:pt x="3342650" y="2695891"/>
-                  </a:lnTo>
-                  <a:lnTo>
-                    <a:pt x="3414273" y="2698865"/>
-                  </a:lnTo>
-                  <a:lnTo>
-                    <a:pt x="3485895" y="2701827"/>
-                  </a:lnTo>
-                  <a:lnTo>
-                    <a:pt x="3557518" y="2704778"/>
-                  </a:lnTo>
-                  <a:lnTo>
-                    <a:pt x="3629140" y="2707718"/>
-                  </a:lnTo>
-                  <a:lnTo>
-                    <a:pt x="3700763" y="2710647"/>
-                  </a:lnTo>
-                  <a:lnTo>
-                    <a:pt x="3772385" y="2713565"/>
-                  </a:lnTo>
-                  <a:lnTo>
-                    <a:pt x="3844008" y="2716472"/>
-                  </a:lnTo>
-                  <a:lnTo>
-                    <a:pt x="3915630" y="2719367"/>
-                  </a:lnTo>
-                  <a:lnTo>
-                    <a:pt x="3987253" y="2722252"/>
-                  </a:lnTo>
-                  <a:lnTo>
-                    <a:pt x="4058875" y="2725126"/>
-                  </a:lnTo>
-                  <a:lnTo>
-                    <a:pt x="4130498" y="2727989"/>
-                  </a:lnTo>
-                  <a:lnTo>
-                    <a:pt x="4202120" y="2730842"/>
-                  </a:lnTo>
-                  <a:lnTo>
-                    <a:pt x="4273743" y="2733683"/>
-                  </a:lnTo>
-                  <a:lnTo>
-                    <a:pt x="4345365" y="2736514"/>
-                  </a:lnTo>
-                  <a:lnTo>
-                    <a:pt x="4416988" y="2739334"/>
-                  </a:lnTo>
-                  <a:lnTo>
-                    <a:pt x="4488610" y="2742144"/>
-                  </a:lnTo>
-                  <a:lnTo>
-                    <a:pt x="4560233" y="2744943"/>
-                  </a:lnTo>
-                  <a:lnTo>
-                    <a:pt x="4631855" y="2747731"/>
-                  </a:lnTo>
-                  <a:lnTo>
-                    <a:pt x="4703478" y="2750509"/>
-                  </a:lnTo>
-                  <a:lnTo>
-                    <a:pt x="4775101" y="2753276"/>
-                  </a:lnTo>
-                  <a:lnTo>
-                    <a:pt x="4846723" y="2756033"/>
+                    <a:pt x="41421" y="87033"/>
+                  </a:lnTo>
+                  <a:lnTo>
+                    <a:pt x="113044" y="231139"/>
+                  </a:lnTo>
+                  <a:lnTo>
+                    <a:pt x="184666" y="369132"/>
+                  </a:lnTo>
+                  <a:lnTo>
+                    <a:pt x="256289" y="501270"/>
+                  </a:lnTo>
+                  <a:lnTo>
+                    <a:pt x="327911" y="627802"/>
+                  </a:lnTo>
+                  <a:lnTo>
+                    <a:pt x="399534" y="748966"/>
+                  </a:lnTo>
+                  <a:lnTo>
+                    <a:pt x="471156" y="864989"/>
+                  </a:lnTo>
+                  <a:lnTo>
+                    <a:pt x="542779" y="976090"/>
+                  </a:lnTo>
+                  <a:lnTo>
+                    <a:pt x="614401" y="1082478"/>
+                  </a:lnTo>
+                  <a:lnTo>
+                    <a:pt x="686024" y="1184352"/>
+                  </a:lnTo>
+                  <a:lnTo>
+                    <a:pt x="757646" y="1281904"/>
+                  </a:lnTo>
+                  <a:lnTo>
+                    <a:pt x="829269" y="1375318"/>
+                  </a:lnTo>
+                  <a:lnTo>
+                    <a:pt x="900891" y="1464768"/>
+                  </a:lnTo>
+                  <a:lnTo>
+                    <a:pt x="972514" y="1550424"/>
+                  </a:lnTo>
+                  <a:lnTo>
+                    <a:pt x="1044136" y="1632445"/>
+                  </a:lnTo>
+                  <a:lnTo>
+                    <a:pt x="1115759" y="1710987"/>
+                  </a:lnTo>
+                  <a:lnTo>
+                    <a:pt x="1187382" y="1786197"/>
+                  </a:lnTo>
+                  <a:lnTo>
+                    <a:pt x="1259004" y="1858215"/>
+                  </a:lnTo>
+                  <a:lnTo>
+                    <a:pt x="1330627" y="1927179"/>
+                  </a:lnTo>
+                  <a:lnTo>
+                    <a:pt x="1402249" y="1993217"/>
+                  </a:lnTo>
+                  <a:lnTo>
+                    <a:pt x="1473872" y="2056452"/>
+                  </a:lnTo>
+                  <a:lnTo>
+                    <a:pt x="1545494" y="2117006"/>
+                  </a:lnTo>
+                  <a:lnTo>
+                    <a:pt x="1617117" y="2174990"/>
+                  </a:lnTo>
+                  <a:lnTo>
+                    <a:pt x="1688739" y="2230514"/>
+                  </a:lnTo>
+                  <a:lnTo>
+                    <a:pt x="1760362" y="2283683"/>
+                  </a:lnTo>
+                  <a:lnTo>
+                    <a:pt x="1831984" y="2334596"/>
+                  </a:lnTo>
+                  <a:lnTo>
+                    <a:pt x="1903607" y="2383348"/>
+                  </a:lnTo>
+                  <a:lnTo>
+                    <a:pt x="1975229" y="2430033"/>
+                  </a:lnTo>
+                  <a:lnTo>
+                    <a:pt x="2046852" y="2474737"/>
+                  </a:lnTo>
+                  <a:lnTo>
+                    <a:pt x="2118474" y="2517544"/>
+                  </a:lnTo>
+                  <a:lnTo>
+                    <a:pt x="2190097" y="2558536"/>
+                  </a:lnTo>
+                  <a:lnTo>
+                    <a:pt x="2261719" y="2597788"/>
+                  </a:lnTo>
+                  <a:lnTo>
+                    <a:pt x="2333342" y="2635375"/>
+                  </a:lnTo>
+                  <a:lnTo>
+                    <a:pt x="2404964" y="2655614"/>
+                  </a:lnTo>
+                  <a:lnTo>
+                    <a:pt x="2476587" y="2658379"/>
+                  </a:lnTo>
+                  <a:lnTo>
+                    <a:pt x="2548210" y="2661135"/>
+                  </a:lnTo>
+                  <a:lnTo>
+                    <a:pt x="2619832" y="2663882"/>
+                  </a:lnTo>
+                  <a:lnTo>
+                    <a:pt x="2691455" y="2666619"/>
+                  </a:lnTo>
+                  <a:lnTo>
+                    <a:pt x="2763077" y="2669348"/>
+                  </a:lnTo>
+                  <a:lnTo>
+                    <a:pt x="2834700" y="2672067"/>
+                  </a:lnTo>
+                  <a:lnTo>
+                    <a:pt x="2906322" y="2674777"/>
+                  </a:lnTo>
+                  <a:lnTo>
+                    <a:pt x="2977945" y="2677479"/>
+                  </a:lnTo>
+                  <a:lnTo>
+                    <a:pt x="3049567" y="2680171"/>
+                  </a:lnTo>
+                  <a:lnTo>
+                    <a:pt x="3121190" y="2682854"/>
+                  </a:lnTo>
+                  <a:lnTo>
+                    <a:pt x="3192812" y="2685528"/>
+                  </a:lnTo>
+                  <a:lnTo>
+                    <a:pt x="3264435" y="2688194"/>
+                  </a:lnTo>
+                  <a:lnTo>
+                    <a:pt x="3336057" y="2690850"/>
+                  </a:lnTo>
+                  <a:lnTo>
+                    <a:pt x="3407680" y="2693498"/>
+                  </a:lnTo>
+                  <a:lnTo>
+                    <a:pt x="3479302" y="2696136"/>
+                  </a:lnTo>
+                  <a:lnTo>
+                    <a:pt x="3550925" y="2698766"/>
+                  </a:lnTo>
+                  <a:lnTo>
+                    <a:pt x="3622547" y="2701388"/>
+                  </a:lnTo>
+                  <a:lnTo>
+                    <a:pt x="3694170" y="2704000"/>
+                  </a:lnTo>
+                  <a:lnTo>
+                    <a:pt x="3765792" y="2706604"/>
+                  </a:lnTo>
+                  <a:lnTo>
+                    <a:pt x="3837415" y="2709199"/>
+                  </a:lnTo>
+                  <a:lnTo>
+                    <a:pt x="3909038" y="2711785"/>
+                  </a:lnTo>
+                  <a:lnTo>
+                    <a:pt x="3980660" y="2714362"/>
+                  </a:lnTo>
+                  <a:lnTo>
+                    <a:pt x="4052283" y="2716932"/>
+                  </a:lnTo>
+                  <a:lnTo>
+                    <a:pt x="4123905" y="2719492"/>
+                  </a:lnTo>
+                  <a:lnTo>
+                    <a:pt x="4195528" y="2722044"/>
+                  </a:lnTo>
+                  <a:lnTo>
+                    <a:pt x="4267150" y="2724587"/>
+                  </a:lnTo>
+                  <a:lnTo>
+                    <a:pt x="4338773" y="2727122"/>
+                  </a:lnTo>
+                  <a:lnTo>
+                    <a:pt x="4410395" y="2729649"/>
+                  </a:lnTo>
+                  <a:lnTo>
+                    <a:pt x="4482018" y="2732167"/>
+                  </a:lnTo>
+                  <a:lnTo>
+                    <a:pt x="4553640" y="2734676"/>
+                  </a:lnTo>
+                  <a:lnTo>
+                    <a:pt x="4625263" y="2737178"/>
+                  </a:lnTo>
+                  <a:lnTo>
+                    <a:pt x="4696885" y="2739670"/>
+                  </a:lnTo>
+                  <a:lnTo>
+                    <a:pt x="4768508" y="2742155"/>
+                  </a:lnTo>
+                  <a:lnTo>
+                    <a:pt x="4840130" y="2744631"/>
                   </a:lnTo>
                 </a:path>
               </a:pathLst>
@@ -3686,309 +3686,309 @@
           </p:nvSpPr>
           <p:spPr>
             <a:xfrm>
-              <a:off x="1172049" y="4499124"/>
-              <a:ext cx="7090630" cy="873449"/>
+              <a:off x="1172049" y="4528006"/>
+              <a:ext cx="7090630" cy="843192"/>
             </a:xfrm>
             <a:custGeom>
               <a:avLst/>
               <a:pathLst>
-                <a:path w="7090630" h="873449">
+                <a:path w="7090630" h="843192">
                   <a:moveTo>
-                    <a:pt x="7090630" y="873449"/>
+                    <a:pt x="7090630" y="843192"/>
                   </a:moveTo>
                   <a:lnTo>
-                    <a:pt x="7019007" y="865257"/>
-                  </a:lnTo>
-                  <a:lnTo>
-                    <a:pt x="6947385" y="856702"/>
-                  </a:lnTo>
-                  <a:lnTo>
-                    <a:pt x="6875762" y="847767"/>
-                  </a:lnTo>
-                  <a:lnTo>
-                    <a:pt x="6804139" y="838436"/>
-                  </a:lnTo>
-                  <a:lnTo>
-                    <a:pt x="6732517" y="828691"/>
-                  </a:lnTo>
-                  <a:lnTo>
-                    <a:pt x="6660894" y="818514"/>
-                  </a:lnTo>
-                  <a:lnTo>
-                    <a:pt x="6589272" y="807885"/>
-                  </a:lnTo>
-                  <a:lnTo>
-                    <a:pt x="6517649" y="796785"/>
-                  </a:lnTo>
-                  <a:lnTo>
-                    <a:pt x="6446027" y="785193"/>
-                  </a:lnTo>
-                  <a:lnTo>
-                    <a:pt x="6374404" y="773086"/>
-                  </a:lnTo>
-                  <a:lnTo>
-                    <a:pt x="6302782" y="760442"/>
-                  </a:lnTo>
-                  <a:lnTo>
-                    <a:pt x="6231159" y="747238"/>
-                  </a:lnTo>
-                  <a:lnTo>
-                    <a:pt x="6159537" y="733447"/>
-                  </a:lnTo>
-                  <a:lnTo>
-                    <a:pt x="6087914" y="719045"/>
-                  </a:lnTo>
-                  <a:lnTo>
-                    <a:pt x="6016292" y="704004"/>
-                  </a:lnTo>
-                  <a:lnTo>
-                    <a:pt x="5944669" y="688296"/>
-                  </a:lnTo>
-                  <a:lnTo>
-                    <a:pt x="5873047" y="671891"/>
-                  </a:lnTo>
-                  <a:lnTo>
-                    <a:pt x="5801424" y="654759"/>
-                  </a:lnTo>
-                  <a:lnTo>
-                    <a:pt x="5729802" y="636866"/>
-                  </a:lnTo>
-                  <a:lnTo>
-                    <a:pt x="5658179" y="618180"/>
-                  </a:lnTo>
-                  <a:lnTo>
-                    <a:pt x="5586557" y="598665"/>
-                  </a:lnTo>
-                  <a:lnTo>
-                    <a:pt x="5514934" y="578284"/>
-                  </a:lnTo>
-                  <a:lnTo>
-                    <a:pt x="5443311" y="556999"/>
-                  </a:lnTo>
-                  <a:lnTo>
-                    <a:pt x="5371689" y="534770"/>
-                  </a:lnTo>
-                  <a:lnTo>
-                    <a:pt x="5300066" y="511555"/>
-                  </a:lnTo>
-                  <a:lnTo>
-                    <a:pt x="5228444" y="487311"/>
-                  </a:lnTo>
-                  <a:lnTo>
-                    <a:pt x="5156821" y="461991"/>
-                  </a:lnTo>
-                  <a:lnTo>
-                    <a:pt x="5085199" y="435547"/>
-                  </a:lnTo>
-                  <a:lnTo>
-                    <a:pt x="5013576" y="407931"/>
-                  </a:lnTo>
-                  <a:lnTo>
-                    <a:pt x="4941954" y="379090"/>
-                  </a:lnTo>
-                  <a:lnTo>
-                    <a:pt x="4870331" y="348969"/>
-                  </a:lnTo>
-                  <a:lnTo>
-                    <a:pt x="4798709" y="317512"/>
-                  </a:lnTo>
-                  <a:lnTo>
-                    <a:pt x="4727086" y="284660"/>
-                  </a:lnTo>
-                  <a:lnTo>
-                    <a:pt x="4655464" y="250351"/>
-                  </a:lnTo>
-                  <a:lnTo>
-                    <a:pt x="4583841" y="227439"/>
-                  </a:lnTo>
-                  <a:lnTo>
-                    <a:pt x="4512219" y="224292"/>
-                  </a:lnTo>
-                  <a:lnTo>
-                    <a:pt x="4440596" y="221133"/>
-                  </a:lnTo>
-                  <a:lnTo>
-                    <a:pt x="4368974" y="217962"/>
-                  </a:lnTo>
-                  <a:lnTo>
-                    <a:pt x="4297351" y="214779"/>
-                  </a:lnTo>
-                  <a:lnTo>
-                    <a:pt x="4225729" y="211584"/>
-                  </a:lnTo>
-                  <a:lnTo>
-                    <a:pt x="4154106" y="208377"/>
-                  </a:lnTo>
-                  <a:lnTo>
-                    <a:pt x="4082483" y="205158"/>
-                  </a:lnTo>
-                  <a:lnTo>
-                    <a:pt x="4010861" y="201926"/>
-                  </a:lnTo>
-                  <a:lnTo>
-                    <a:pt x="3939238" y="198683"/>
-                  </a:lnTo>
-                  <a:lnTo>
-                    <a:pt x="3867616" y="195427"/>
-                  </a:lnTo>
-                  <a:lnTo>
-                    <a:pt x="3795993" y="192159"/>
-                  </a:lnTo>
-                  <a:lnTo>
-                    <a:pt x="3724371" y="188878"/>
-                  </a:lnTo>
-                  <a:lnTo>
-                    <a:pt x="3652748" y="185585"/>
-                  </a:lnTo>
-                  <a:lnTo>
-                    <a:pt x="3581126" y="182279"/>
-                  </a:lnTo>
-                  <a:lnTo>
-                    <a:pt x="3509503" y="178961"/>
-                  </a:lnTo>
-                  <a:lnTo>
-                    <a:pt x="3437881" y="175631"/>
-                  </a:lnTo>
-                  <a:lnTo>
-                    <a:pt x="3366258" y="172287"/>
-                  </a:lnTo>
-                  <a:lnTo>
-                    <a:pt x="3294636" y="168931"/>
-                  </a:lnTo>
-                  <a:lnTo>
-                    <a:pt x="3223013" y="165563"/>
-                  </a:lnTo>
-                  <a:lnTo>
-                    <a:pt x="3151391" y="162181"/>
-                  </a:lnTo>
-                  <a:lnTo>
-                    <a:pt x="3079768" y="158787"/>
-                  </a:lnTo>
-                  <a:lnTo>
-                    <a:pt x="3008146" y="155380"/>
-                  </a:lnTo>
-                  <a:lnTo>
-                    <a:pt x="2936523" y="151960"/>
-                  </a:lnTo>
-                  <a:lnTo>
-                    <a:pt x="2864901" y="148527"/>
-                  </a:lnTo>
-                  <a:lnTo>
-                    <a:pt x="2793278" y="145081"/>
-                  </a:lnTo>
-                  <a:lnTo>
-                    <a:pt x="2721655" y="141622"/>
-                  </a:lnTo>
-                  <a:lnTo>
-                    <a:pt x="2650033" y="138150"/>
-                  </a:lnTo>
-                  <a:lnTo>
-                    <a:pt x="2578410" y="134665"/>
-                  </a:lnTo>
-                  <a:lnTo>
-                    <a:pt x="2506788" y="131166"/>
-                  </a:lnTo>
-                  <a:lnTo>
-                    <a:pt x="2435165" y="127654"/>
-                  </a:lnTo>
-                  <a:lnTo>
-                    <a:pt x="2363543" y="124129"/>
-                  </a:lnTo>
-                  <a:lnTo>
-                    <a:pt x="2291920" y="120591"/>
-                  </a:lnTo>
-                  <a:lnTo>
-                    <a:pt x="2220298" y="117039"/>
-                  </a:lnTo>
-                  <a:lnTo>
-                    <a:pt x="2148675" y="113474"/>
-                  </a:lnTo>
-                  <a:lnTo>
-                    <a:pt x="2077053" y="109895"/>
-                  </a:lnTo>
-                  <a:lnTo>
-                    <a:pt x="2005430" y="106303"/>
-                  </a:lnTo>
-                  <a:lnTo>
-                    <a:pt x="1933808" y="102697"/>
-                  </a:lnTo>
-                  <a:lnTo>
-                    <a:pt x="1862185" y="99077"/>
-                  </a:lnTo>
-                  <a:lnTo>
-                    <a:pt x="1790563" y="95444"/>
-                  </a:lnTo>
-                  <a:lnTo>
-                    <a:pt x="1718940" y="91797"/>
-                  </a:lnTo>
-                  <a:lnTo>
-                    <a:pt x="1647318" y="88136"/>
-                  </a:lnTo>
-                  <a:lnTo>
-                    <a:pt x="1575695" y="84461"/>
-                  </a:lnTo>
-                  <a:lnTo>
-                    <a:pt x="1504073" y="80773"/>
-                  </a:lnTo>
-                  <a:lnTo>
-                    <a:pt x="1432450" y="77070"/>
-                  </a:lnTo>
-                  <a:lnTo>
-                    <a:pt x="1360827" y="73353"/>
-                  </a:lnTo>
-                  <a:lnTo>
-                    <a:pt x="1289205" y="69623"/>
-                  </a:lnTo>
-                  <a:lnTo>
-                    <a:pt x="1217582" y="65878"/>
-                  </a:lnTo>
-                  <a:lnTo>
-                    <a:pt x="1145960" y="62119"/>
-                  </a:lnTo>
-                  <a:lnTo>
-                    <a:pt x="1074337" y="58345"/>
-                  </a:lnTo>
-                  <a:lnTo>
-                    <a:pt x="1002715" y="54558"/>
-                  </a:lnTo>
-                  <a:lnTo>
-                    <a:pt x="931092" y="50756"/>
-                  </a:lnTo>
-                  <a:lnTo>
-                    <a:pt x="859470" y="46939"/>
-                  </a:lnTo>
-                  <a:lnTo>
-                    <a:pt x="787847" y="43109"/>
-                  </a:lnTo>
-                  <a:lnTo>
-                    <a:pt x="716225" y="39263"/>
-                  </a:lnTo>
-                  <a:lnTo>
-                    <a:pt x="644602" y="35403"/>
-                  </a:lnTo>
-                  <a:lnTo>
-                    <a:pt x="572980" y="31529"/>
-                  </a:lnTo>
-                  <a:lnTo>
-                    <a:pt x="501357" y="27640"/>
-                  </a:lnTo>
-                  <a:lnTo>
-                    <a:pt x="429735" y="23736"/>
-                  </a:lnTo>
-                  <a:lnTo>
-                    <a:pt x="358112" y="19817"/>
-                  </a:lnTo>
-                  <a:lnTo>
-                    <a:pt x="286490" y="15883"/>
-                  </a:lnTo>
-                  <a:lnTo>
-                    <a:pt x="214867" y="11935"/>
-                  </a:lnTo>
-                  <a:lnTo>
-                    <a:pt x="143245" y="7971"/>
-                  </a:lnTo>
-                  <a:lnTo>
-                    <a:pt x="71622" y="3993"/>
+                    <a:pt x="7019007" y="834949"/>
+                  </a:lnTo>
+                  <a:lnTo>
+                    <a:pt x="6947385" y="826341"/>
+                  </a:lnTo>
+                  <a:lnTo>
+                    <a:pt x="6875762" y="817351"/>
+                  </a:lnTo>
+                  <a:lnTo>
+                    <a:pt x="6804139" y="807963"/>
+                  </a:lnTo>
+                  <a:lnTo>
+                    <a:pt x="6732517" y="798160"/>
+                  </a:lnTo>
+                  <a:lnTo>
+                    <a:pt x="6660894" y="787921"/>
+                  </a:lnTo>
+                  <a:lnTo>
+                    <a:pt x="6589272" y="777230"/>
+                  </a:lnTo>
+                  <a:lnTo>
+                    <a:pt x="6517649" y="766064"/>
+                  </a:lnTo>
+                  <a:lnTo>
+                    <a:pt x="6446027" y="754404"/>
+                  </a:lnTo>
+                  <a:lnTo>
+                    <a:pt x="6374404" y="742228"/>
+                  </a:lnTo>
+                  <a:lnTo>
+                    <a:pt x="6302782" y="729512"/>
+                  </a:lnTo>
+                  <a:lnTo>
+                    <a:pt x="6231159" y="716232"/>
+                  </a:lnTo>
+                  <a:lnTo>
+                    <a:pt x="6159537" y="702364"/>
+                  </a:lnTo>
+                  <a:lnTo>
+                    <a:pt x="6087914" y="687882"/>
+                  </a:lnTo>
+                  <a:lnTo>
+                    <a:pt x="6016292" y="672758"/>
+                  </a:lnTo>
+                  <a:lnTo>
+                    <a:pt x="5944669" y="656964"/>
+                  </a:lnTo>
+                  <a:lnTo>
+                    <a:pt x="5873047" y="640470"/>
+                  </a:lnTo>
+                  <a:lnTo>
+                    <a:pt x="5801424" y="623246"/>
+                  </a:lnTo>
+                  <a:lnTo>
+                    <a:pt x="5729802" y="605258"/>
+                  </a:lnTo>
+                  <a:lnTo>
+                    <a:pt x="5658179" y="586474"/>
+                  </a:lnTo>
+                  <a:lnTo>
+                    <a:pt x="5586557" y="566857"/>
+                  </a:lnTo>
+                  <a:lnTo>
+                    <a:pt x="5514934" y="546371"/>
+                  </a:lnTo>
+                  <a:lnTo>
+                    <a:pt x="5443311" y="524978"/>
+                  </a:lnTo>
+                  <a:lnTo>
+                    <a:pt x="5371689" y="502636"/>
+                  </a:lnTo>
+                  <a:lnTo>
+                    <a:pt x="5300066" y="479305"/>
+                  </a:lnTo>
+                  <a:lnTo>
+                    <a:pt x="5228444" y="454940"/>
+                  </a:lnTo>
+                  <a:lnTo>
+                    <a:pt x="5156821" y="429496"/>
+                  </a:lnTo>
+                  <a:lnTo>
+                    <a:pt x="5085199" y="402924"/>
+                  </a:lnTo>
+                  <a:lnTo>
+                    <a:pt x="5013576" y="375175"/>
+                  </a:lnTo>
+                  <a:lnTo>
+                    <a:pt x="4941954" y="346197"/>
+                  </a:lnTo>
+                  <a:lnTo>
+                    <a:pt x="4870331" y="315935"/>
+                  </a:lnTo>
+                  <a:lnTo>
+                    <a:pt x="4798709" y="284332"/>
+                  </a:lnTo>
+                  <a:lnTo>
+                    <a:pt x="4727086" y="251329"/>
+                  </a:lnTo>
+                  <a:lnTo>
+                    <a:pt x="4655464" y="216863"/>
+                  </a:lnTo>
+                  <a:lnTo>
+                    <a:pt x="4583841" y="198335"/>
+                  </a:lnTo>
+                  <a:lnTo>
+                    <a:pt x="4512219" y="195552"/>
+                  </a:lnTo>
+                  <a:lnTo>
+                    <a:pt x="4440596" y="192758"/>
+                  </a:lnTo>
+                  <a:lnTo>
+                    <a:pt x="4368974" y="189956"/>
+                  </a:lnTo>
+                  <a:lnTo>
+                    <a:pt x="4297351" y="187144"/>
+                  </a:lnTo>
+                  <a:lnTo>
+                    <a:pt x="4225729" y="184323"/>
+                  </a:lnTo>
+                  <a:lnTo>
+                    <a:pt x="4154106" y="181492"/>
+                  </a:lnTo>
+                  <a:lnTo>
+                    <a:pt x="4082483" y="178652"/>
+                  </a:lnTo>
+                  <a:lnTo>
+                    <a:pt x="4010861" y="175802"/>
+                  </a:lnTo>
+                  <a:lnTo>
+                    <a:pt x="3939238" y="172943"/>
+                  </a:lnTo>
+                  <a:lnTo>
+                    <a:pt x="3867616" y="170074"/>
+                  </a:lnTo>
+                  <a:lnTo>
+                    <a:pt x="3795993" y="167195"/>
+                  </a:lnTo>
+                  <a:lnTo>
+                    <a:pt x="3724371" y="164307"/>
+                  </a:lnTo>
+                  <a:lnTo>
+                    <a:pt x="3652748" y="161410"/>
+                  </a:lnTo>
+                  <a:lnTo>
+                    <a:pt x="3581126" y="158502"/>
+                  </a:lnTo>
+                  <a:lnTo>
+                    <a:pt x="3509503" y="155585"/>
+                  </a:lnTo>
+                  <a:lnTo>
+                    <a:pt x="3437881" y="152658"/>
+                  </a:lnTo>
+                  <a:lnTo>
+                    <a:pt x="3366258" y="149721"/>
+                  </a:lnTo>
+                  <a:lnTo>
+                    <a:pt x="3294636" y="146774"/>
+                  </a:lnTo>
+                  <a:lnTo>
+                    <a:pt x="3223013" y="143818"/>
+                  </a:lnTo>
+                  <a:lnTo>
+                    <a:pt x="3151391" y="140851"/>
+                  </a:lnTo>
+                  <a:lnTo>
+                    <a:pt x="3079768" y="137875"/>
+                  </a:lnTo>
+                  <a:lnTo>
+                    <a:pt x="3008146" y="134889"/>
+                  </a:lnTo>
+                  <a:lnTo>
+                    <a:pt x="2936523" y="131892"/>
+                  </a:lnTo>
+                  <a:lnTo>
+                    <a:pt x="2864901" y="128886"/>
+                  </a:lnTo>
+                  <a:lnTo>
+                    <a:pt x="2793278" y="125869"/>
+                  </a:lnTo>
+                  <a:lnTo>
+                    <a:pt x="2721655" y="122843"/>
+                  </a:lnTo>
+                  <a:lnTo>
+                    <a:pt x="2650033" y="119806"/>
+                  </a:lnTo>
+                  <a:lnTo>
+                    <a:pt x="2578410" y="116759"/>
+                  </a:lnTo>
+                  <a:lnTo>
+                    <a:pt x="2506788" y="113702"/>
+                  </a:lnTo>
+                  <a:lnTo>
+                    <a:pt x="2435165" y="110635"/>
+                  </a:lnTo>
+                  <a:lnTo>
+                    <a:pt x="2363543" y="107557"/>
+                  </a:lnTo>
+                  <a:lnTo>
+                    <a:pt x="2291920" y="104469"/>
+                  </a:lnTo>
+                  <a:lnTo>
+                    <a:pt x="2220298" y="101371"/>
+                  </a:lnTo>
+                  <a:lnTo>
+                    <a:pt x="2148675" y="98262"/>
+                  </a:lnTo>
+                  <a:lnTo>
+                    <a:pt x="2077053" y="95143"/>
+                  </a:lnTo>
+                  <a:lnTo>
+                    <a:pt x="2005430" y="92014"/>
+                  </a:lnTo>
+                  <a:lnTo>
+                    <a:pt x="1933808" y="88874"/>
+                  </a:lnTo>
+                  <a:lnTo>
+                    <a:pt x="1862185" y="85723"/>
+                  </a:lnTo>
+                  <a:lnTo>
+                    <a:pt x="1790563" y="82562"/>
+                  </a:lnTo>
+                  <a:lnTo>
+                    <a:pt x="1718940" y="79391"/>
+                  </a:lnTo>
+                  <a:lnTo>
+                    <a:pt x="1647318" y="76208"/>
+                  </a:lnTo>
+                  <a:lnTo>
+                    <a:pt x="1575695" y="73015"/>
+                  </a:lnTo>
+                  <a:lnTo>
+                    <a:pt x="1504073" y="69812"/>
+                  </a:lnTo>
+                  <a:lnTo>
+                    <a:pt x="1432450" y="66597"/>
+                  </a:lnTo>
+                  <a:lnTo>
+                    <a:pt x="1360827" y="63372"/>
+                  </a:lnTo>
+                  <a:lnTo>
+                    <a:pt x="1289205" y="60136"/>
+                  </a:lnTo>
+                  <a:lnTo>
+                    <a:pt x="1217582" y="56889"/>
+                  </a:lnTo>
+                  <a:lnTo>
+                    <a:pt x="1145960" y="53632"/>
+                  </a:lnTo>
+                  <a:lnTo>
+                    <a:pt x="1074337" y="50363"/>
+                  </a:lnTo>
+                  <a:lnTo>
+                    <a:pt x="1002715" y="47084"/>
+                  </a:lnTo>
+                  <a:lnTo>
+                    <a:pt x="931092" y="43793"/>
+                  </a:lnTo>
+                  <a:lnTo>
+                    <a:pt x="859470" y="40492"/>
+                  </a:lnTo>
+                  <a:lnTo>
+                    <a:pt x="787847" y="37179"/>
+                  </a:lnTo>
+                  <a:lnTo>
+                    <a:pt x="716225" y="33855"/>
+                  </a:lnTo>
+                  <a:lnTo>
+                    <a:pt x="644602" y="30520"/>
+                  </a:lnTo>
+                  <a:lnTo>
+                    <a:pt x="572980" y="27174"/>
+                  </a:lnTo>
+                  <a:lnTo>
+                    <a:pt x="501357" y="23817"/>
+                  </a:lnTo>
+                  <a:lnTo>
+                    <a:pt x="429735" y="20449"/>
+                  </a:lnTo>
+                  <a:lnTo>
+                    <a:pt x="358112" y="17069"/>
+                  </a:lnTo>
+                  <a:lnTo>
+                    <a:pt x="286490" y="13678"/>
+                  </a:lnTo>
+                  <a:lnTo>
+                    <a:pt x="214867" y="10275"/>
+                  </a:lnTo>
+                  <a:lnTo>
+                    <a:pt x="143245" y="6862"/>
+                  </a:lnTo>
+                  <a:lnTo>
+                    <a:pt x="71622" y="3436"/>
                   </a:lnTo>
                   <a:lnTo>
                     <a:pt x="0" y="0"/>
@@ -4011,303 +4011,303 @@
           </p:nvSpPr>
           <p:spPr>
             <a:xfrm>
-              <a:off x="1427216" y="2073503"/>
-              <a:ext cx="6835462" cy="3117152"/>
+              <a:off x="1390904" y="2073503"/>
+              <a:ext cx="6871774" cy="3112919"/>
             </a:xfrm>
             <a:custGeom>
               <a:avLst/>
               <a:pathLst>
-                <a:path w="6835462" h="3117152">
+                <a:path w="6871774" h="3112919">
                   <a:moveTo>
                     <a:pt x="0" y="0"/>
                   </a:moveTo>
                   <a:lnTo>
-                    <a:pt x="31322" y="35994"/>
-                  </a:lnTo>
-                  <a:lnTo>
-                    <a:pt x="102945" y="116381"/>
-                  </a:lnTo>
-                  <a:lnTo>
-                    <a:pt x="174567" y="194893"/>
-                  </a:lnTo>
-                  <a:lnTo>
-                    <a:pt x="246190" y="271575"/>
-                  </a:lnTo>
-                  <a:lnTo>
-                    <a:pt x="317812" y="346469"/>
-                  </a:lnTo>
-                  <a:lnTo>
-                    <a:pt x="389435" y="419617"/>
-                  </a:lnTo>
-                  <a:lnTo>
-                    <a:pt x="461057" y="491060"/>
-                  </a:lnTo>
-                  <a:lnTo>
-                    <a:pt x="532680" y="560836"/>
-                  </a:lnTo>
-                  <a:lnTo>
-                    <a:pt x="604302" y="628986"/>
-                  </a:lnTo>
-                  <a:lnTo>
-                    <a:pt x="675925" y="695547"/>
-                  </a:lnTo>
-                  <a:lnTo>
-                    <a:pt x="747547" y="760556"/>
-                  </a:lnTo>
-                  <a:lnTo>
-                    <a:pt x="819170" y="824049"/>
-                  </a:lnTo>
-                  <a:lnTo>
-                    <a:pt x="890792" y="886061"/>
-                  </a:lnTo>
-                  <a:lnTo>
-                    <a:pt x="962415" y="946628"/>
-                  </a:lnTo>
-                  <a:lnTo>
-                    <a:pt x="1034037" y="1005783"/>
-                  </a:lnTo>
-                  <a:lnTo>
-                    <a:pt x="1105660" y="1063558"/>
-                  </a:lnTo>
-                  <a:lnTo>
-                    <a:pt x="1177282" y="1119987"/>
-                  </a:lnTo>
-                  <a:lnTo>
-                    <a:pt x="1248905" y="1175100"/>
-                  </a:lnTo>
-                  <a:lnTo>
-                    <a:pt x="1320527" y="1228927"/>
-                  </a:lnTo>
-                  <a:lnTo>
-                    <a:pt x="1392150" y="1281500"/>
-                  </a:lnTo>
-                  <a:lnTo>
-                    <a:pt x="1463773" y="1332847"/>
-                  </a:lnTo>
-                  <a:lnTo>
-                    <a:pt x="1535395" y="1382997"/>
-                  </a:lnTo>
-                  <a:lnTo>
-                    <a:pt x="1607018" y="1431977"/>
-                  </a:lnTo>
-                  <a:lnTo>
-                    <a:pt x="1678640" y="1479816"/>
-                  </a:lnTo>
-                  <a:lnTo>
-                    <a:pt x="1750263" y="1526539"/>
-                  </a:lnTo>
-                  <a:lnTo>
-                    <a:pt x="1821885" y="1572172"/>
-                  </a:lnTo>
-                  <a:lnTo>
-                    <a:pt x="1893508" y="1616742"/>
-                  </a:lnTo>
-                  <a:lnTo>
-                    <a:pt x="1965130" y="1660273"/>
-                  </a:lnTo>
-                  <a:lnTo>
-                    <a:pt x="2036753" y="1702788"/>
-                  </a:lnTo>
-                  <a:lnTo>
-                    <a:pt x="2108375" y="1744312"/>
-                  </a:lnTo>
-                  <a:lnTo>
-                    <a:pt x="2179998" y="1784869"/>
-                  </a:lnTo>
-                  <a:lnTo>
-                    <a:pt x="2251620" y="1824479"/>
-                  </a:lnTo>
-                  <a:lnTo>
-                    <a:pt x="2323243" y="1863166"/>
-                  </a:lnTo>
-                  <a:lnTo>
-                    <a:pt x="2394865" y="1900951"/>
-                  </a:lnTo>
-                  <a:lnTo>
-                    <a:pt x="2466488" y="1937855"/>
-                  </a:lnTo>
-                  <a:lnTo>
-                    <a:pt x="2538110" y="1973899"/>
-                  </a:lnTo>
-                  <a:lnTo>
-                    <a:pt x="2609733" y="2009102"/>
-                  </a:lnTo>
-                  <a:lnTo>
-                    <a:pt x="2681355" y="2043484"/>
-                  </a:lnTo>
-                  <a:lnTo>
-                    <a:pt x="2752978" y="2077065"/>
-                  </a:lnTo>
-                  <a:lnTo>
-                    <a:pt x="2824601" y="2109863"/>
-                  </a:lnTo>
-                  <a:lnTo>
-                    <a:pt x="2896223" y="2141896"/>
-                  </a:lnTo>
-                  <a:lnTo>
-                    <a:pt x="2967846" y="2173182"/>
-                  </a:lnTo>
-                  <a:lnTo>
-                    <a:pt x="3039468" y="2203739"/>
-                  </a:lnTo>
-                  <a:lnTo>
-                    <a:pt x="3111091" y="2233583"/>
-                  </a:lnTo>
-                  <a:lnTo>
-                    <a:pt x="3182713" y="2262731"/>
-                  </a:lnTo>
-                  <a:lnTo>
-                    <a:pt x="3254336" y="2291200"/>
-                  </a:lnTo>
-                  <a:lnTo>
-                    <a:pt x="3325958" y="2319005"/>
-                  </a:lnTo>
-                  <a:lnTo>
-                    <a:pt x="3397581" y="2346162"/>
-                  </a:lnTo>
-                  <a:lnTo>
-                    <a:pt x="3469203" y="2372686"/>
-                  </a:lnTo>
-                  <a:lnTo>
-                    <a:pt x="3540826" y="2398591"/>
-                  </a:lnTo>
-                  <a:lnTo>
-                    <a:pt x="3612448" y="2423892"/>
-                  </a:lnTo>
-                  <a:lnTo>
-                    <a:pt x="3684071" y="2448603"/>
-                  </a:lnTo>
-                  <a:lnTo>
-                    <a:pt x="3755693" y="2472738"/>
-                  </a:lnTo>
-                  <a:lnTo>
-                    <a:pt x="3827316" y="2496311"/>
-                  </a:lnTo>
-                  <a:lnTo>
-                    <a:pt x="3898938" y="2519333"/>
-                  </a:lnTo>
-                  <a:lnTo>
-                    <a:pt x="3970561" y="2541819"/>
-                  </a:lnTo>
-                  <a:lnTo>
-                    <a:pt x="4042183" y="2563781"/>
-                  </a:lnTo>
-                  <a:lnTo>
-                    <a:pt x="4113806" y="2585231"/>
-                  </a:lnTo>
-                  <a:lnTo>
-                    <a:pt x="4185429" y="2606180"/>
-                  </a:lnTo>
-                  <a:lnTo>
-                    <a:pt x="4257051" y="2626641"/>
-                  </a:lnTo>
-                  <a:lnTo>
-                    <a:pt x="4328674" y="2646625"/>
-                  </a:lnTo>
-                  <a:lnTo>
-                    <a:pt x="4400296" y="2666143"/>
-                  </a:lnTo>
-                  <a:lnTo>
-                    <a:pt x="4471919" y="2685206"/>
-                  </a:lnTo>
-                  <a:lnTo>
-                    <a:pt x="4543541" y="2703825"/>
-                  </a:lnTo>
-                  <a:lnTo>
-                    <a:pt x="4615164" y="2722009"/>
-                  </a:lnTo>
-                  <a:lnTo>
-                    <a:pt x="4686786" y="2739770"/>
-                  </a:lnTo>
-                  <a:lnTo>
-                    <a:pt x="4758409" y="2757116"/>
-                  </a:lnTo>
-                  <a:lnTo>
-                    <a:pt x="4830031" y="2774058"/>
-                  </a:lnTo>
-                  <a:lnTo>
-                    <a:pt x="4901654" y="2790605"/>
-                  </a:lnTo>
-                  <a:lnTo>
-                    <a:pt x="4973276" y="2806766"/>
-                  </a:lnTo>
-                  <a:lnTo>
-                    <a:pt x="5044899" y="2822550"/>
-                  </a:lnTo>
-                  <a:lnTo>
-                    <a:pt x="5116521" y="2837967"/>
-                  </a:lnTo>
-                  <a:lnTo>
-                    <a:pt x="5188144" y="2853023"/>
-                  </a:lnTo>
-                  <a:lnTo>
-                    <a:pt x="5259766" y="2867729"/>
-                  </a:lnTo>
-                  <a:lnTo>
-                    <a:pt x="5331389" y="2882092"/>
-                  </a:lnTo>
-                  <a:lnTo>
-                    <a:pt x="5403011" y="2896120"/>
-                  </a:lnTo>
-                  <a:lnTo>
-                    <a:pt x="5474634" y="2909821"/>
-                  </a:lnTo>
-                  <a:lnTo>
-                    <a:pt x="5546257" y="2923202"/>
-                  </a:lnTo>
-                  <a:lnTo>
-                    <a:pt x="5617879" y="2936272"/>
-                  </a:lnTo>
-                  <a:lnTo>
-                    <a:pt x="5689502" y="2949037"/>
-                  </a:lnTo>
-                  <a:lnTo>
-                    <a:pt x="5761124" y="2961504"/>
-                  </a:lnTo>
-                  <a:lnTo>
-                    <a:pt x="5832747" y="2973680"/>
-                  </a:lnTo>
-                  <a:lnTo>
-                    <a:pt x="5904369" y="2985573"/>
-                  </a:lnTo>
-                  <a:lnTo>
-                    <a:pt x="5975992" y="2997188"/>
-                  </a:lnTo>
-                  <a:lnTo>
-                    <a:pt x="6047614" y="3008533"/>
-                  </a:lnTo>
-                  <a:lnTo>
-                    <a:pt x="6119237" y="3019612"/>
-                  </a:lnTo>
-                  <a:lnTo>
-                    <a:pt x="6190859" y="3030434"/>
-                  </a:lnTo>
-                  <a:lnTo>
-                    <a:pt x="6262482" y="3041003"/>
-                  </a:lnTo>
-                  <a:lnTo>
-                    <a:pt x="6334104" y="3051326"/>
-                  </a:lnTo>
-                  <a:lnTo>
-                    <a:pt x="6405727" y="3061408"/>
-                  </a:lnTo>
-                  <a:lnTo>
-                    <a:pt x="6477349" y="3071256"/>
-                  </a:lnTo>
-                  <a:lnTo>
-                    <a:pt x="6548972" y="3080873"/>
-                  </a:lnTo>
-                  <a:lnTo>
-                    <a:pt x="6620594" y="3090266"/>
-                  </a:lnTo>
-                  <a:lnTo>
-                    <a:pt x="6692217" y="3099441"/>
-                  </a:lnTo>
-                  <a:lnTo>
-                    <a:pt x="6763839" y="3108401"/>
-                  </a:lnTo>
-                  <a:lnTo>
-                    <a:pt x="6835462" y="3117152"/>
+                    <a:pt x="67634" y="76017"/>
+                  </a:lnTo>
+                  <a:lnTo>
+                    <a:pt x="139257" y="154659"/>
+                  </a:lnTo>
+                  <a:lnTo>
+                    <a:pt x="210879" y="231487"/>
+                  </a:lnTo>
+                  <a:lnTo>
+                    <a:pt x="282502" y="306541"/>
+                  </a:lnTo>
+                  <a:lnTo>
+                    <a:pt x="354124" y="379863"/>
+                  </a:lnTo>
+                  <a:lnTo>
+                    <a:pt x="425747" y="451493"/>
+                  </a:lnTo>
+                  <a:lnTo>
+                    <a:pt x="497369" y="521471"/>
+                  </a:lnTo>
+                  <a:lnTo>
+                    <a:pt x="568992" y="589833"/>
+                  </a:lnTo>
+                  <a:lnTo>
+                    <a:pt x="640614" y="656617"/>
+                  </a:lnTo>
+                  <a:lnTo>
+                    <a:pt x="712237" y="721861"/>
+                  </a:lnTo>
+                  <a:lnTo>
+                    <a:pt x="783859" y="785598"/>
+                  </a:lnTo>
+                  <a:lnTo>
+                    <a:pt x="855482" y="847865"/>
+                  </a:lnTo>
+                  <a:lnTo>
+                    <a:pt x="927104" y="908695"/>
+                  </a:lnTo>
+                  <a:lnTo>
+                    <a:pt x="998727" y="968121"/>
+                  </a:lnTo>
+                  <a:lnTo>
+                    <a:pt x="1070349" y="1026175"/>
+                  </a:lnTo>
+                  <a:lnTo>
+                    <a:pt x="1141972" y="1082890"/>
+                  </a:lnTo>
+                  <a:lnTo>
+                    <a:pt x="1213595" y="1138296"/>
+                  </a:lnTo>
+                  <a:lnTo>
+                    <a:pt x="1285217" y="1192424"/>
+                  </a:lnTo>
+                  <a:lnTo>
+                    <a:pt x="1356840" y="1245302"/>
+                  </a:lnTo>
+                  <a:lnTo>
+                    <a:pt x="1428462" y="1296960"/>
+                  </a:lnTo>
+                  <a:lnTo>
+                    <a:pt x="1500085" y="1347425"/>
+                  </a:lnTo>
+                  <a:lnTo>
+                    <a:pt x="1571707" y="1396727"/>
+                  </a:lnTo>
+                  <a:lnTo>
+                    <a:pt x="1643330" y="1444890"/>
+                  </a:lnTo>
+                  <a:lnTo>
+                    <a:pt x="1714952" y="1491942"/>
+                  </a:lnTo>
+                  <a:lnTo>
+                    <a:pt x="1786575" y="1537908"/>
+                  </a:lnTo>
+                  <a:lnTo>
+                    <a:pt x="1858197" y="1582813"/>
+                  </a:lnTo>
+                  <a:lnTo>
+                    <a:pt x="1929820" y="1626682"/>
+                  </a:lnTo>
+                  <a:lnTo>
+                    <a:pt x="2001442" y="1669539"/>
+                  </a:lnTo>
+                  <a:lnTo>
+                    <a:pt x="2073065" y="1711406"/>
+                  </a:lnTo>
+                  <a:lnTo>
+                    <a:pt x="2144687" y="1752308"/>
+                  </a:lnTo>
+                  <a:lnTo>
+                    <a:pt x="2216310" y="1792265"/>
+                  </a:lnTo>
+                  <a:lnTo>
+                    <a:pt x="2287932" y="1831300"/>
+                  </a:lnTo>
+                  <a:lnTo>
+                    <a:pt x="2359555" y="1869435"/>
+                  </a:lnTo>
+                  <a:lnTo>
+                    <a:pt x="2431177" y="1906689"/>
+                  </a:lnTo>
+                  <a:lnTo>
+                    <a:pt x="2502800" y="1943084"/>
+                  </a:lnTo>
+                  <a:lnTo>
+                    <a:pt x="2574422" y="1978639"/>
+                  </a:lnTo>
+                  <a:lnTo>
+                    <a:pt x="2646045" y="2013373"/>
+                  </a:lnTo>
+                  <a:lnTo>
+                    <a:pt x="2717668" y="2047306"/>
+                  </a:lnTo>
+                  <a:lnTo>
+                    <a:pt x="2789290" y="2080455"/>
+                  </a:lnTo>
+                  <a:lnTo>
+                    <a:pt x="2860913" y="2112840"/>
+                  </a:lnTo>
+                  <a:lnTo>
+                    <a:pt x="2932535" y="2144477"/>
+                  </a:lnTo>
+                  <a:lnTo>
+                    <a:pt x="3004158" y="2175384"/>
+                  </a:lnTo>
+                  <a:lnTo>
+                    <a:pt x="3075780" y="2205578"/>
+                  </a:lnTo>
+                  <a:lnTo>
+                    <a:pt x="3147403" y="2235075"/>
+                  </a:lnTo>
+                  <a:lnTo>
+                    <a:pt x="3219025" y="2263891"/>
+                  </a:lnTo>
+                  <a:lnTo>
+                    <a:pt x="3290648" y="2292043"/>
+                  </a:lnTo>
+                  <a:lnTo>
+                    <a:pt x="3362270" y="2319544"/>
+                  </a:lnTo>
+                  <a:lnTo>
+                    <a:pt x="3433893" y="2346411"/>
+                  </a:lnTo>
+                  <a:lnTo>
+                    <a:pt x="3505515" y="2372658"/>
+                  </a:lnTo>
+                  <a:lnTo>
+                    <a:pt x="3577138" y="2398300"/>
+                  </a:lnTo>
+                  <a:lnTo>
+                    <a:pt x="3648760" y="2423349"/>
+                  </a:lnTo>
+                  <a:lnTo>
+                    <a:pt x="3720383" y="2447820"/>
+                  </a:lnTo>
+                  <a:lnTo>
+                    <a:pt x="3792005" y="2471727"/>
+                  </a:lnTo>
+                  <a:lnTo>
+                    <a:pt x="3863628" y="2495082"/>
+                  </a:lnTo>
+                  <a:lnTo>
+                    <a:pt x="3935250" y="2517898"/>
+                  </a:lnTo>
+                  <a:lnTo>
+                    <a:pt x="4006873" y="2540188"/>
+                  </a:lnTo>
+                  <a:lnTo>
+                    <a:pt x="4078496" y="2561963"/>
+                  </a:lnTo>
+                  <a:lnTo>
+                    <a:pt x="4150118" y="2583235"/>
+                  </a:lnTo>
+                  <a:lnTo>
+                    <a:pt x="4221741" y="2604017"/>
+                  </a:lnTo>
+                  <a:lnTo>
+                    <a:pt x="4293363" y="2624319"/>
+                  </a:lnTo>
+                  <a:lnTo>
+                    <a:pt x="4364986" y="2644152"/>
+                  </a:lnTo>
+                  <a:lnTo>
+                    <a:pt x="4436608" y="2663528"/>
+                  </a:lnTo>
+                  <a:lnTo>
+                    <a:pt x="4508231" y="2682457"/>
+                  </a:lnTo>
+                  <a:lnTo>
+                    <a:pt x="4579853" y="2700949"/>
+                  </a:lnTo>
+                  <a:lnTo>
+                    <a:pt x="4651476" y="2719014"/>
+                  </a:lnTo>
+                  <a:lnTo>
+                    <a:pt x="4723098" y="2736662"/>
+                  </a:lnTo>
+                  <a:lnTo>
+                    <a:pt x="4794721" y="2753903"/>
+                  </a:lnTo>
+                  <a:lnTo>
+                    <a:pt x="4866343" y="2770746"/>
+                  </a:lnTo>
+                  <a:lnTo>
+                    <a:pt x="4937966" y="2787200"/>
+                  </a:lnTo>
+                  <a:lnTo>
+                    <a:pt x="5009588" y="2803275"/>
+                  </a:lnTo>
+                  <a:lnTo>
+                    <a:pt x="5081211" y="2818978"/>
+                  </a:lnTo>
+                  <a:lnTo>
+                    <a:pt x="5152833" y="2834320"/>
+                  </a:lnTo>
+                  <a:lnTo>
+                    <a:pt x="5224456" y="2849307"/>
+                  </a:lnTo>
+                  <a:lnTo>
+                    <a:pt x="5296078" y="2863948"/>
+                  </a:lnTo>
+                  <a:lnTo>
+                    <a:pt x="5367701" y="2878252"/>
+                  </a:lnTo>
+                  <a:lnTo>
+                    <a:pt x="5439324" y="2892225"/>
+                  </a:lnTo>
+                  <a:lnTo>
+                    <a:pt x="5510946" y="2905876"/>
+                  </a:lnTo>
+                  <a:lnTo>
+                    <a:pt x="5582569" y="2919212"/>
+                  </a:lnTo>
+                  <a:lnTo>
+                    <a:pt x="5654191" y="2932240"/>
+                  </a:lnTo>
+                  <a:lnTo>
+                    <a:pt x="5725814" y="2944967"/>
+                  </a:lnTo>
+                  <a:lnTo>
+                    <a:pt x="5797436" y="2957401"/>
+                  </a:lnTo>
+                  <a:lnTo>
+                    <a:pt x="5869059" y="2969548"/>
+                  </a:lnTo>
+                  <a:lnTo>
+                    <a:pt x="5940681" y="2981414"/>
+                  </a:lnTo>
+                  <a:lnTo>
+                    <a:pt x="6012304" y="2993007"/>
+                  </a:lnTo>
+                  <a:lnTo>
+                    <a:pt x="6083926" y="3004332"/>
+                  </a:lnTo>
+                  <a:lnTo>
+                    <a:pt x="6155549" y="3015396"/>
+                  </a:lnTo>
+                  <a:lnTo>
+                    <a:pt x="6227171" y="3026204"/>
+                  </a:lnTo>
+                  <a:lnTo>
+                    <a:pt x="6298794" y="3036763"/>
+                  </a:lnTo>
+                  <a:lnTo>
+                    <a:pt x="6370416" y="3047078"/>
+                  </a:lnTo>
+                  <a:lnTo>
+                    <a:pt x="6442039" y="3057156"/>
+                  </a:lnTo>
+                  <a:lnTo>
+                    <a:pt x="6513661" y="3067000"/>
+                  </a:lnTo>
+                  <a:lnTo>
+                    <a:pt x="6585284" y="3076618"/>
+                  </a:lnTo>
+                  <a:lnTo>
+                    <a:pt x="6656906" y="3086013"/>
+                  </a:lnTo>
+                  <a:lnTo>
+                    <a:pt x="6728529" y="3095192"/>
+                  </a:lnTo>
+                  <a:lnTo>
+                    <a:pt x="6800152" y="3104159"/>
+                  </a:lnTo>
+                  <a:lnTo>
+                    <a:pt x="6871774" y="3112919"/>
                   </a:lnTo>
                 </a:path>
               </a:pathLst>
@@ -4379,7 +4379,7 @@
           </p:nvSpPr>
           <p:spPr>
             <a:xfrm>
-              <a:off x="5783789" y="2073503"/>
+              <a:off x="5793129" y="2073503"/>
               <a:ext cx="0" cy="3649639"/>
             </a:xfrm>
             <a:custGeom>
@@ -4422,7 +4422,7 @@
           </p:nvSpPr>
           <p:spPr>
             <a:xfrm>
-              <a:off x="4658599" y="2073503"/>
+              <a:off x="4667548" y="2073503"/>
               <a:ext cx="0" cy="3649639"/>
             </a:xfrm>
             <a:custGeom>
@@ -4465,7 +4465,7 @@
           </p:nvSpPr>
           <p:spPr>
             <a:xfrm>
-              <a:off x="6864197" y="2073503"/>
+              <a:off x="6868063" y="2073503"/>
               <a:ext cx="0" cy="3649639"/>
             </a:xfrm>
             <a:custGeom>
@@ -4738,7 +4738,7 @@
           </p:nvSpPr>
           <p:spPr>
             <a:xfrm>
-              <a:off x="3120823" y="5785772"/>
+              <a:off x="3120990" y="5785772"/>
               <a:ext cx="161574" cy="80101"/>
             </a:xfrm>
             <a:prstGeom prst="rect">
@@ -4784,7 +4784,7 @@
           </p:nvSpPr>
           <p:spPr>
             <a:xfrm>
-              <a:off x="5688698" y="5785772"/>
+              <a:off x="5688107" y="5785772"/>
               <a:ext cx="62179" cy="80101"/>
             </a:xfrm>
             <a:prstGeom prst="rect">
@@ -4830,7 +4830,7 @@
           </p:nvSpPr>
           <p:spPr>
             <a:xfrm>
-              <a:off x="8175787" y="5785772"/>
+              <a:off x="8174437" y="5785772"/>
               <a:ext cx="124358" cy="80101"/>
             </a:xfrm>
             <a:prstGeom prst="rect">
@@ -5001,7 +5001,7 @@
                   <a:latin typeface="Helvetica"/>
                   <a:cs typeface="Helvetica"/>
                 </a:rPr>
-                <a:t>subHR per 10 mL/min decline: 1.39 (1.05-1.84), p_Bonf = 0.118 (n = 6)  |  per IQR decline (Δ = 21.9): 2.07 (1.12-3.81)  |  IQR: [-10.5, 11.4]</a:t>
+                <a:t>subHR per 10 mL/min decline: 1.39 (1.05-1.84), p_Bonf = 0.133 (n = 6)  |  per IQR decline (Δ = 21.9): 2.05 (1.11-3.79)  |  IQR: [-10.4, 11.4]</a:t>
               </a:r>
             </a:p>
           </p:txBody>
